--- a/en/slides/22-Computer_Architecture-Verm1_Part_4-Code.pptx
+++ b/en/slides/22-Computer_Architecture-Verm1_Part_4-Code.pptx
@@ -150,22 +150,34 @@
   <p:extLst>
     <p:ext uri="{521415D9-36F7-43E2-AB2F-B90AF26B5E84}">
       <p14:sectionLst xmlns:p14="http://schemas.microsoft.com/office/powerpoint/2010/main">
-        <p14:section name="Opening" id="{ee1e6288-453a-1027-6485-3a6a2e81a998}">
+        <p14:section name="Opening" id="{845f280e-8c38-ae46-c1ba-af07fbf5cc53}">
           <p14:sldIdLst>
             <p14:sldId id="256"/>
             <p14:sldId id="257"/>
           </p14:sldIdLst>
         </p14:section>
-        <p14:section name="The listings" id="{c6d27882-f07e-72f8-6f9e-3dff0cbf3643}">
+        <p14:section name="The listings" id="{0df615c1-3d61-f70d-2021-4f4a730dab26}">
           <p14:sldIdLst>
             <p14:sldId id="258"/>
+          </p14:sldIdLst>
+        </p14:section>
+        <p14:section name="Step 1: the score in digits" id="{f23cc2b2-df69-fb52-2c42-c1e44fa59360}">
+          <p14:sldIdLst>
             <p14:sldId id="259"/>
             <p14:sldId id="260"/>
             <p14:sldId id="261"/>
             <p14:sldId id="262"/>
+          </p14:sldIdLst>
+        </p14:section>
+        <p14:section name="Step 2: levels" id="{40254e39-4f70-2199-6398-94098af53715}">
+          <p14:sldIdLst>
             <p14:sldId id="263"/>
             <p14:sldId id="264"/>
             <p14:sldId id="265"/>
+          </p14:sldIdLst>
+        </p14:section>
+        <p14:section name="Step 3: step tells what it changed" id="{c8dbe412-1dfb-17c3-5cb5-6fb25d88b58d}">
+          <p14:sldIdLst>
             <p14:sldId id="266"/>
             <p14:sldId id="267"/>
             <p14:sldId id="268"/>
@@ -174,6 +186,10 @@
             <p14:sldId id="271"/>
             <p14:sldId id="272"/>
             <p14:sldId id="273"/>
+          </p14:sldIdLst>
+        </p14:section>
+        <p14:section name="Step 4: draw only what changed" id="{60f4f6a5-c85a-3ddf-f95e-842e1c3f736c}">
+          <p14:sldIdLst>
             <p14:sldId id="274"/>
             <p14:sldId id="275"/>
             <p14:sldId id="276"/>
@@ -185,6 +201,10 @@
             <p14:sldId id="282"/>
             <p14:sldId id="283"/>
             <p14:sldId id="284"/>
+          </p14:sldIdLst>
+        </p14:section>
+        <p14:section name="Step 5: measure" id="{0acc51a6-00db-27b9-fab8-3129f6b2e777}">
+          <p14:sldIdLst>
             <p14:sldId id="285"/>
             <p14:sldId id="286"/>
             <p14:sldId id="287"/>
@@ -196,7 +216,7 @@
             <p14:sldId id="293"/>
           </p14:sldIdLst>
         </p14:section>
-        <p14:section name="Run it and test it" id="{2d1c6084-0f2d-5af4-9fb9-ada8ff57970c}">
+        <p14:section name="Run it and test it" id="{57cce9ff-7163-78b9-8964-96a6ad1787c4}">
           <p14:sldIdLst>
             <p14:sldId id="294"/>
             <p14:sldId id="295"/>
@@ -205,7 +225,7 @@
             <p14:sldId id="298"/>
           </p14:sldIdLst>
         </p14:section>
-        <p14:section name="Exercises" id="{56ab498d-4a27-68dc-be49-74f094c16cad}">
+        <p14:section name="Exercises" id="{0c534bc1-f556-ade6-c7cd-fe25aa6a301a}">
           <p14:sldIdLst>
             <p14:sldId id="299"/>
           </p14:sldIdLst>
@@ -5445,7 +5465,63 @@
       </p:sp>
       <p:sp>
         <p:nvSpPr>
-          <p:cNvPr id="12" name="Shape 10"/>
+          <p:cNvPr id="12" name="Text 10"/>
+          <p:cNvSpPr txBox="1"/>
+          <p:nvPr/>
+        </p:nvSpPr>
+        <p:spPr>
+          <a:xfrm>
+            <a:off x="4693615" y="566928"/>
+            <a:ext cx="6949440" cy="640080"/>
+          </a:xfrm>
+          <a:prstGeom prst="rect">
+            <a:avLst/>
+          </a:prstGeom>
+          <a:noFill/>
+          <a:ln/>
+        </p:spPr>
+        <p:txBody>
+          <a:bodyPr wrap="square" lIns="0" tIns="0" rIns="0" bIns="0" rtlCol="0" anchor="t"/>
+          <a:lstStyle/>
+          <a:p>
+            <a:pPr algn="r" indent="0" marL="0">
+              <a:buNone/>
+            </a:pPr>
+            <a:r>
+              <a:rPr lang="en-US" sz="1300" dirty="0">
+                <a:solidFill>
+                  <a:srgbClr val="CFE3EA"/>
+                </a:solidFill>
+                <a:latin typeface="Calibri" pitchFamily="34" charset="0"/>
+                <a:ea typeface="Calibri" pitchFamily="34" charset="-122"/>
+                <a:cs typeface="Calibri" pitchFamily="34" charset="-120"/>
+              </a:rPr>
+              <a:t>Code deck. The concepts, the figures and the questions are in the lecture deck:</a:t>
+            </a:r>
+            <a:endParaRPr lang="en-US" sz="1300" dirty="0"/>
+          </a:p>
+          <a:p>
+            <a:pPr algn="r" indent="0" marL="0">
+              <a:buNone/>
+            </a:pPr>
+            <a:r>
+              <a:rPr lang="en-US" sz="1300" dirty="0">
+                <a:solidFill>
+                  <a:srgbClr val="CFE3EA"/>
+                </a:solidFill>
+                <a:latin typeface="Calibri" pitchFamily="34" charset="0"/>
+                <a:ea typeface="Calibri" pitchFamily="34" charset="-122"/>
+                <a:cs typeface="Calibri" pitchFamily="34" charset="-120"/>
+              </a:rPr>
+              <a:t>22-Computer_Architecture-Verm1_Part_4.pptx</a:t>
+            </a:r>
+            <a:endParaRPr lang="en-US" sz="1300" dirty="0"/>
+          </a:p>
+        </p:txBody>
+      </p:sp>
+      <p:sp>
+        <p:nvSpPr>
+          <p:cNvPr id="13" name="Shape 11"/>
           <p:cNvSpPr/>
           <p:nvPr/>
         </p:nvSpPr>
@@ -5472,7 +5548,7 @@
       </p:sp>
       <p:pic>
         <p:nvPicPr>
-          <p:cNvPr id="13" name="Image 0" descr="/Users/raffaelemontella/devel/riscv-prg32/computer-architecture-with-prg32/tools/assets/verm1_p4_play.png">    </p:cNvPr>
+          <p:cNvPr id="14" name="Image 0" descr="/Users/raffaelemontella/devel/riscv-prg32/computer-architecture-with-prg32/tools/assets/verm1_p4_play.png">    </p:cNvPr>
           <p:cNvPicPr>
             <a:picLocks noChangeAspect="1"/>
           </p:cNvPicPr>

--- a/en/slides/22-Computer_Architecture-Verm1_Part_4-Code.pptx
+++ b/en/slides/22-Computer_Architecture-Verm1_Part_4-Code.pptx
@@ -150,18 +150,18 @@
   <p:extLst>
     <p:ext uri="{521415D9-36F7-43E2-AB2F-B90AF26B5E84}">
       <p14:sectionLst xmlns:p14="http://schemas.microsoft.com/office/powerpoint/2010/main">
-        <p14:section name="Opening" id="{845f280e-8c38-ae46-c1ba-af07fbf5cc53}">
+        <p14:section name="Opening" id="{bf09bdca-f730-2159-9617-da385ec5a568}">
           <p14:sldIdLst>
             <p14:sldId id="256"/>
             <p14:sldId id="257"/>
           </p14:sldIdLst>
         </p14:section>
-        <p14:section name="The listings" id="{0df615c1-3d61-f70d-2021-4f4a730dab26}">
+        <p14:section name="The listings" id="{21439780-9c95-9257-eb4b-06bf0b3978c4}">
           <p14:sldIdLst>
             <p14:sldId id="258"/>
           </p14:sldIdLst>
         </p14:section>
-        <p14:section name="Step 1: the score in digits" id="{f23cc2b2-df69-fb52-2c42-c1e44fa59360}">
+        <p14:section name="Step 1: the score in digits" id="{eabb208f-0c6b-6f44-7fb9-0d4f17fd67d6}">
           <p14:sldIdLst>
             <p14:sldId id="259"/>
             <p14:sldId id="260"/>
@@ -169,14 +169,14 @@
             <p14:sldId id="262"/>
           </p14:sldIdLst>
         </p14:section>
-        <p14:section name="Step 2: levels" id="{40254e39-4f70-2199-6398-94098af53715}">
+        <p14:section name="Step 2: levels" id="{c9038bb8-57c2-925b-9adc-0d8a9a8c78a6}">
           <p14:sldIdLst>
             <p14:sldId id="263"/>
             <p14:sldId id="264"/>
             <p14:sldId id="265"/>
           </p14:sldIdLst>
         </p14:section>
-        <p14:section name="Step 3: step tells what it changed" id="{c8dbe412-1dfb-17c3-5cb5-6fb25d88b58d}">
+        <p14:section name="Step 3: step tells what it changed" id="{323dac1d-278e-05a8-9f84-a615ffd3a4f2}">
           <p14:sldIdLst>
             <p14:sldId id="266"/>
             <p14:sldId id="267"/>
@@ -188,7 +188,7 @@
             <p14:sldId id="273"/>
           </p14:sldIdLst>
         </p14:section>
-        <p14:section name="Step 4: draw only what changed" id="{60f4f6a5-c85a-3ddf-f95e-842e1c3f736c}">
+        <p14:section name="Step 4: draw only what changed" id="{b96a3c09-7a57-e0f9-cf1f-d26b17f00051}">
           <p14:sldIdLst>
             <p14:sldId id="274"/>
             <p14:sldId id="275"/>
@@ -203,7 +203,7 @@
             <p14:sldId id="284"/>
           </p14:sldIdLst>
         </p14:section>
-        <p14:section name="Step 5: measure" id="{0acc51a6-00db-27b9-fab8-3129f6b2e777}">
+        <p14:section name="Step 5: measure" id="{e8116d8f-e7c5-6449-e1d0-d365133578dc}">
           <p14:sldIdLst>
             <p14:sldId id="285"/>
             <p14:sldId id="286"/>
@@ -216,7 +216,7 @@
             <p14:sldId id="293"/>
           </p14:sldIdLst>
         </p14:section>
-        <p14:section name="Run it and test it" id="{57cce9ff-7163-78b9-8964-96a6ad1787c4}">
+        <p14:section name="Run it and test it" id="{206a13b6-a645-890b-21da-e754a2f189a6}">
           <p14:sldIdLst>
             <p14:sldId id="294"/>
             <p14:sldId id="295"/>
@@ -225,7 +225,7 @@
             <p14:sldId id="298"/>
           </p14:sldIdLst>
         </p14:section>
-        <p14:section name="Exercises" id="{0c534bc1-f556-ade6-c7cd-fe25aa6a301a}">
+        <p14:section name="Exercises" id="{a7573174-ea8f-7240-6f25-2d9208c0c585}">
           <p14:sldIdLst>
             <p14:sldId id="299"/>
           </p14:sldIdLst>
@@ -634,7 +634,9 @@
           <a:p>
             <a:r>
               <a:rPr lang="en-US" dirty="0"/>
-              <a:t>This is the code deck of Lecture 22. The lecture deck holds the concepts; this one holds everything you type and run: the listings with their explanation, the complete program, what it shows, and the way to test it on each of the three hosts.</a:t>
+              <a:t>This is the code deck of Lecture 22. The lecture deck holds the concepts; this one holds everything you type and run: the listings with their explanation, the complete program, what it shows, and the way to test it on each of the three hosts.
+Learning status: UNDERSTAND NOW, by the end of this lecture you explain it, trace it and apply it on your own; USE NOW, you follow and use the recipe today; how it works inside is explained later, or is not part of the course; UNDERSTAND LATER, recognise the name and what it is for; a later lecture explains it. A slide without a badge is context: a story, an example, a question, an exercise.
+Learning status of this lecture. UNDERSTAND NOW: quotient and remainder; characters and strings; fixed point; the calling convention; arrays in memory; finite-state machines; the frame buffer; the processor cycle. USE NOW: the PRG32 tools, the PRG32-QT debugger (used, not studied, in this course). UNDERSTAND LATER: nothing. A slide without a badge is context: a story, an example, a question, an exercise.</a:t>
             </a:r>
             <a:endParaRPr lang="en-US" dirty="0"/>
           </a:p>
@@ -812,6 +814,7 @@
             <a:r>
               <a:rPr lang="en-US" dirty="0"/>
               <a:t>play_note replaces eat_sound. The caller chooses the note and the duration, in a2 and a4; the function fills in channel, instrument and volume and calls prg32_audio_note. Notice the choice of registers: note and duration are already where the function of the runtime expects them, so nothing has to be moved. A contract designed around the callee saves instructions.
+UNDERSTAND NOW: the calling convention.
 For the lecturer: The arguments stay in the registers where prg32_audio_note expects them: a2 is the note and a4 the duration in both functions. Designing a contract around the callee saves moves.</a:t>
             </a:r>
             <a:endParaRPr lang="en-US" dirty="0"/>
@@ -901,6 +904,7 @@
             <a:r>
               <a:rPr lang="en-US" dirty="0"/>
               <a:t>The beginning of step, with two stores added: before the head moves, its coordinates are written into old_x and old_y. That cell is about to stop being the head and become body, and draw will have to repaint it.
+UNDERSTAND NOW: arrays in memory.
 For the lecturer: Two stores are added to the code of Part 3: the lines that write old_x and old_y.</a:t>
             </a:r>
             <a:endParaRPr lang="en-US" dirty="0"/>
@@ -990,6 +994,7 @@
             <a:r>
               <a:rPr lang="en-US" dirty="0"/>
               <a:t>The branch of the meal. When the worm eats, the tail does not move, so there is no cell to erase: erase_on is set to zero to say so.
+UNDERSTAND NOW: arrays in memory.
 For the lecturer: Two lines are added: the store of zero into erase_on.</a:t>
             </a:r>
             <a:endParaRPr lang="en-US" dirty="0"/>
@@ -1079,6 +1084,7 @@
             <a:r>
               <a:rPr lang="en-US" dirty="0"/>
               <a:t>When the worm does not eat, the tail leaves a cell: its coordinates are saved in erase_x and erase_y, and erase_on becomes 1. Further down, the collision with the body is no longer handled here: it has become a single call to game_is_over.
+UNDERSTAND NOW: arrays in memory.
 For the lecturer: The beginning is new, seven lines; the end is shorter than in Part 3, because the transition to OVER has become a function.</a:t>
             </a:r>
             <a:endParaRPr lang="en-US" dirty="0"/>
@@ -1168,6 +1174,7 @@
             <a:r>
               <a:rPr lang="en-US" dirty="0"/>
               <a:t>The new head is written into the ring and into the map, exactly as in Part 3. The slide is here only because the function continues on the next one.
+UNDERSTAND NOW: arrays in memory.
 For the lecturer: Unchanged lines, shown because the function continues.</a:t>
             </a:r>
             <a:endParaRPr lang="en-US" dirty="0"/>
@@ -1257,6 +1264,7 @@
             <a:r>
               <a:rPr lang="en-US" dirty="0"/>
               <a:t>The new end of step. First dirty is set to 1: a step happened, and draw has work to do. Then, if the worm has eaten: one more point, new food, and a short high note, number 72 for 60 milliseconds, requested with two li and a call.
+UNDERSTAND NOW: the calling convention.
 For the lecturer: This replaces the end of step. Note 72 for 60 milliseconds: the sound of Part 2, through the new function.</a:t>
             </a:r>
             <a:endParaRPr lang="en-US" dirty="0"/>
@@ -1346,6 +1354,7 @@
             <a:r>
               <a:rPr lang="en-US" dirty="0"/>
               <a:t>game_is_over gathers in one place everything that the transition from PLAY to OVER involves: the new state, the update of the best score, dirty set to 2 because a whole new screen must be drawn, and a long low note, number 36 for 400 milliseconds. A transition of the state machine deserves a function of its own.
+UNDERSTAND NOW: finite-state machines.
 For the lecturer: A transition of the state machine deserves a function of its own: state, outputs and sound in one place.</a:t>
             </a:r>
             <a:endParaRPr lang="en-US" dirty="0"/>
@@ -1524,6 +1533,7 @@
             <a:r>
               <a:rPr lang="en-US" dirty="0"/>
               <a:t>The new verm1_draw reads dirty and clears it at once. If it was zero, it returns immediately: no stack frame, no call, five machine instructions. If it was 1, a step happened and draw_changes is called. If it was 2, the state changed and draw_full redraws everything. The most frequent case is the cheapest, which is the mark of a well-made optimisation.
+UNDERSTAND NOW: the frame buffer.
 For the lecturer: Replace verm1_draw. The frame is created only if there is something to do: the common case, nothing changed, costs five machine instructions.</a:t>
             </a:r>
             <a:endParaRPr lang="en-US" dirty="0"/>
@@ -1702,6 +1712,7 @@
             <a:r>
               <a:rPr lang="en-US" dirty="0"/>
               <a:t>draw_changes paints at most three cells. If erase_on is set, the cell left by the tail becomes black. The old head is repainted in the colour of the body. Then the new head, the food and the score. The order matters: the head may enter exactly the cell that the tail has just left, so the erasure must come first and the head afterwards.
+UNDERSTAND NOW: the frame buffer.
 For the lecturer: The head may enter the cell that the tail has just left: erasing first and drawing the head afterwards gives the right picture.</a:t>
             </a:r>
             <a:endParaRPr lang="en-US" dirty="0"/>
@@ -1791,6 +1802,7 @@
             <a:r>
               <a:rPr lang="en-US" dirty="0"/>
               <a:t>draw_full is the body of the old verm1_draw: it clears the screen and draws the score; in the TITLE state it adds the invitation and returns. It is called once for every change of state, not at every frame.
+UNDERSTAND NOW: the frame buffer.
 For the lecturer: Called once for each change of state.</a:t>
             </a:r>
             <a:endParaRPr lang="en-US" dirty="0"/>
@@ -1880,6 +1892,7 @@
             <a:r>
               <a:rPr lang="en-US" dirty="0"/>
               <a:t>The second half of draw_full: in PLAY and OVER it draws the worm and the food with their functions, and in OVER it adds the two words of the game over.
+UNDERSTAND NOW: the frame buffer.
 For the lecturer: The second half of draw_full.</a:t>
             </a:r>
             <a:endParaRPr lang="en-US" dirty="0"/>
@@ -1969,6 +1982,7 @@
             <a:r>
               <a:rPr lang="en-US" dirty="0"/>
               <a:t>draw_head draws one cell in bright green: the entry head_i of the ring. It is a small function with a single job, used by draw_changes.
+UNDERSTAND NOW: the frame buffer.
 For the lecturer: A small function used by draw_changes.</a:t>
             </a:r>
             <a:endParaRPr lang="en-US" dirty="0"/>
@@ -2057,7 +2071,8 @@
           <a:p>
             <a:r>
               <a:rPr lang="en-US" dirty="0"/>
-              <a:t>draw_food: the three lines that were inside draw now have a name and two callers, the full drawing and the partial one.</a:t>
+              <a:t>draw_food: the three lines that were inside draw now have a name and two callers, the full drawing and the partial one.
+UNDERSTAND NOW: the frame buffer.</a:t>
             </a:r>
             <a:endParaRPr lang="en-US" dirty="0"/>
           </a:p>
@@ -2235,6 +2250,7 @@
             <a:r>
               <a:rPr lang="en-US" dirty="0"/>
               <a:t>verm1_init with three lines added: dirty starts at 2, because the title screen must be drawn once.
+UNDERSTAND NOW: finite-state machines.
 For the lecturer: Replace verm1_init: three lines are added.</a:t>
             </a:r>
             <a:endParaRPr lang="en-US" dirty="0"/>
@@ -2324,6 +2340,7 @@
             <a:r>
               <a:rPr lang="en-US" dirty="0"/>
               <a:t>In verm1_update, the transition from OVER back to TITLE now also sets dirty to 2: a new state is a new screen.
+UNDERSTAND NOW: finite-state machines.
 For the lecturer: Replace the same part of verm1_update.</a:t>
             </a:r>
             <a:endParaRPr lang="en-US" dirty="0"/>
@@ -2413,6 +2430,7 @@
             <a:r>
               <a:rPr lang="en-US" dirty="0"/>
               <a:t>The same in new_game, for the transition from TITLE to PLAY. This is the rule of the technique: every transition asks for a full drawing, every step for a partial one. If you forget one, the screen shows a state that is no longer true, and this is the typical bug.
+UNDERSTAND NOW: finite-state machines.
 For the lecturer: Every transition of the machine asks for a full drawing; every step asks for a partial one. Forgetting one of them is the typical bug of this technique: the screen shows a state that is no longer true.</a:t>
             </a:r>
             <a:endParaRPr lang="en-US" dirty="0"/>
@@ -2591,6 +2609,7 @@
             <a:r>
               <a:rPr lang="en-US" dirty="0"/>
               <a:t>The same two commands as always. Before changing anything, run Part 3 in debug mode and write down what the telemetry shows during a game: retired instructions, frames per second, late frames. These numbers are the "before" of the measure that closes the lecture; without them you cannot say what you have gained.
+USE NOW: the PRG32 tools (used, not studied, in this course).
 For the lecturer: The same two commands. Before you start, run Part 3 in debug mode and write down what the telemetry shows during a game: retired instructions, frames per second, late frames. You will need the numbers in step 5.</a:t>
             </a:r>
             <a:endParaRPr lang="en-US" dirty="0"/>
@@ -3562,6 +3581,7 @@
             <a:r>
               <a:rPr lang="en-US" dirty="0"/>
               <a:t>to_decimal has a contract written in its comment: the value in a0, the address of three characters in a1. Three times it does the same thing: remu gives the remainder of the division by ten, 48 is added, sb stores the byte, and divu leaves the quotient for the next round. The offsets are 2, 1 and 0: from the units to the hundreds. It is a leaf function: it calls nobody and uses only temporary registers, so it needs no stack frame at all.
+UNDERSTAND NOW: quotient and remainder.
 For the lecturer: Values above 999 would show only their last three digits: a limit that no player will meet soon. The division instructions are slow, tens of clock cycles each on a small processor, and ten per step of the worm are nothing.</a:t>
             </a:r>
             <a:endParaRPr lang="en-US" dirty="0"/>
@@ -3651,6 +3671,7 @@
             <a:r>
               <a:rPr lang="en-US" dirty="0"/>
               <a:t>The quickest way: PRG32-QT on your own computer. Four steps, each with its command. PRG32-QT behaves like a board on port 8080, which is why the upload command says esp32c6. With debug mode enabled you can stop at any instruction and read registers and memory.
+USE NOW: the PRG32 tools (used, not studied, in this course).
 For the lecturer: Run by the tests: the cartridge of this slide is built with this command and executed on the headless runner of PRG32-QT. Without the toolchain: import the .prg32 file in PRG32-QT and choose Run Cartridge. Keys: arrows or WASD for the joystick, Z or J for A, X or K for B, Enter for Start, Escape to go back to Setup.</a:t>
             </a:r>
             <a:endParaRPr lang="en-US" dirty="0"/>
@@ -3740,6 +3761,7 @@
             <a:r>
               <a:rPr lang="en-US" dirty="0"/>
               <a:t>The same program on the emulator. QEMU runs the real firmware on an emulated chip, so the cartridge must be built for the architecture qemu. Stage the cartridge while QEMU is closed. The firmware opens on the Setup menu: choose Run Cartridge and the slot. Remember that the keyboard is read by the terminal, not by the window with the picture.
+USE NOW: the PRG32 tools (used, not studied, in this course).
 For the lecturer: Checked by the tests up to the staging: the cartridge is built for the architecture qemu and accepted into the flash image of the emulator. What the emulator then shows is not checked automatically: Espressif QEMU needs its window. Since October 2026 the firmware starts on Setup: choose Run Cartridge, then cart0.</a:t>
             </a:r>
             <a:endParaRPr lang="en-US" dirty="0"/>
@@ -3829,6 +3851,7 @@
             <a:r>
               <a:rPr lang="en-US" dirty="0"/>
               <a:t>The same program on the kit. The firmware is written once, through USB; after that cartridges travel over Wi-Fi. The upload command is the one used for PRG32-QT with the address of the board. This is the only host that the automatic tests do not run: try it, and report what you see.
+USE NOW: the PRG32 tools (used, not studied, in this course).
 For the lecturer: Not run by the tests: there is no board on the test machine. The cartridge for the architecture esp32c6 is built by the tests; the steps are those of the PRG32 documentation. If the serial port is not found pass it explicitly. To use the Wi-Fi of the classroom: python3 -m prg32 wifi set --ssid NAME --password PASSWORD --mode sta.</a:t>
             </a:r>
             <a:endParaRPr lang="en-US" dirty="0"/>
@@ -3918,6 +3941,7 @@
             <a:r>
               <a:rPr lang="en-US" dirty="0"/>
               <a:t>The five most common symptoms, what each means, and what to do. Read the message before changing anything: it nearly always names the cause.
+USE NOW: the PRG32 tools (used, not studied, in this course).
 For the lecturer: The first three rows cover most cases. When asking for help, paste the command and the whole message as text. docs/usage/troubleshooting.md of the PRG32 repository has the complete list.</a:t>
             </a:r>
             <a:endParaRPr lang="en-US" dirty="0"/>
@@ -4096,6 +4120,7 @@
             <a:r>
               <a:rPr lang="en-US" dirty="0"/>
               <a:t>draw_score replaces that of Part 3. It calls to_decimal twice, once for the score and once for the best score, each time with the address inside a string where the digits must go: best_txt+5 skips the word BEST and the space. Then the two strings are drawn like any other text. Because text is drawn with its background, the new digits cover the old ones.
+UNDERSTAND NOW: characters and strings.
 For the lecturer: score_txt and best_txt are strings in .data, not .rodata: the program writes into them. Text is drawn with its background colour, so new digits cover the old ones without clearing.</a:t>
             </a:r>
             <a:endParaRPr lang="en-US" dirty="0"/>
@@ -4185,6 +4210,7 @@
             <a:r>
               <a:rPr lang="en-US" dirty="0"/>
               <a:t>The new .data section. Two strings that the program fills in: they are in .data and not in .rodata precisely because the program writes into them. Then six new variables: dirty, the old position of the head, and the cell to erase. They are not used until the third step; type them now, so that the section is written once.
+UNDERSTAND NOW: characters and strings.
 For the lecturer: Type all of it now. The six variables from dirty to erase_y are not used until step 3.</a:t>
             </a:r>
             <a:endParaRPr lang="en-US" dirty="0"/>
@@ -4363,6 +4389,7 @@
             <a:r>
               <a:rPr lang="en-US" dirty="0"/>
               <a:t>The constant SPEED_Q8 is replaced by two: a minimum of 32 and a maximum of 96. They are fixed-point values in 256ths of a cell per frame, as in Part 2: 32 means one step every eight frames, 96 means three steps every eight frames.
+UNDERSTAND NOW: fixed point.
 For the lecturer: Replace the constants of Part 3. Only the two SPEED lines differ.</a:t>
             </a:r>
             <a:endParaRPr lang="en-US" dirty="0"/>
@@ -4452,6 +4479,7 @@
             <a:r>
               <a:rPr lang="en-US" dirty="0"/>
               <a:t>The timer at the end of play_update. The speed is 32 plus four times the score: a shift by two positions and an addition. Then a comparison keeps the smaller between this value and the maximum. The rest is the timer you know: the speed is added to an accumulator, and a step is taken when it passes 256. A value that follows a line and then stays at a limit is a saturation.
+UNDERSTAND NOW: fixed point.
 For the lecturer: Replace the timer at the end of play_update. A saturation: the value follows a line and then stays at the limit, like the clamp of the first laboratory. With fixed point the speed changes by a sixty-fourth of a cell per frame at each meal: no integer speed could be so fine.</a:t>
             </a:r>
             <a:endParaRPr lang="en-US" dirty="0"/>
@@ -5572,6 +5600,420 @@
       </p:pic>
       <p:sp>
         <p:nvSpPr>
+          <p:cNvPr id="15" name="Shape 12"/>
+          <p:cNvSpPr/>
+          <p:nvPr/>
+        </p:nvSpPr>
+        <p:spPr>
+          <a:xfrm>
+            <a:off x="9690303" y="91440"/>
+            <a:ext cx="1952752" cy="274320"/>
+          </a:xfrm>
+          <a:prstGeom prst="rect">
+            <a:avLst/>
+          </a:prstGeom>
+          <a:solidFill>
+            <a:srgbClr val="F3E8FF"/>
+          </a:solidFill>
+          <a:ln w="12700">
+            <a:solidFill>
+              <a:srgbClr val="7E22CE"/>
+            </a:solidFill>
+            <a:prstDash val="dash"/>
+          </a:ln>
+        </p:spPr>
+      </p:sp>
+      <p:sp>
+        <p:nvSpPr>
+          <p:cNvPr id="16" name="Shape 13"/>
+          <p:cNvSpPr/>
+          <p:nvPr/>
+        </p:nvSpPr>
+        <p:spPr>
+          <a:xfrm>
+            <a:off x="9717735" y="128016"/>
+            <a:ext cx="45720" cy="45720"/>
+          </a:xfrm>
+          <a:prstGeom prst="rect">
+            <a:avLst/>
+          </a:prstGeom>
+          <a:solidFill>
+            <a:srgbClr val="7E22CE"/>
+          </a:solidFill>
+          <a:ln w="12700">
+            <a:solidFill>
+              <a:srgbClr val="7E22CE"/>
+            </a:solidFill>
+            <a:prstDash val="solid"/>
+          </a:ln>
+        </p:spPr>
+      </p:sp>
+      <p:sp>
+        <p:nvSpPr>
+          <p:cNvPr id="17" name="Shape 14"/>
+          <p:cNvSpPr/>
+          <p:nvPr/>
+        </p:nvSpPr>
+        <p:spPr>
+          <a:xfrm>
+            <a:off x="9717735" y="205740"/>
+            <a:ext cx="45720" cy="45720"/>
+          </a:xfrm>
+          <a:prstGeom prst="rect">
+            <a:avLst/>
+          </a:prstGeom>
+          <a:solidFill>
+            <a:srgbClr val="7E22CE"/>
+          </a:solidFill>
+          <a:ln w="12700">
+            <a:solidFill>
+              <a:srgbClr val="7E22CE"/>
+            </a:solidFill>
+            <a:prstDash val="solid"/>
+          </a:ln>
+        </p:spPr>
+      </p:sp>
+      <p:sp>
+        <p:nvSpPr>
+          <p:cNvPr id="18" name="Shape 15"/>
+          <p:cNvSpPr/>
+          <p:nvPr/>
+        </p:nvSpPr>
+        <p:spPr>
+          <a:xfrm>
+            <a:off x="9717735" y="283464"/>
+            <a:ext cx="45720" cy="45720"/>
+          </a:xfrm>
+          <a:prstGeom prst="rect">
+            <a:avLst/>
+          </a:prstGeom>
+          <a:solidFill>
+            <a:srgbClr val="7E22CE"/>
+          </a:solidFill>
+          <a:ln w="12700">
+            <a:solidFill>
+              <a:srgbClr val="7E22CE"/>
+            </a:solidFill>
+            <a:prstDash val="solid"/>
+          </a:ln>
+        </p:spPr>
+      </p:sp>
+      <p:pic>
+        <p:nvPicPr>
+          <p:cNvPr id="19" name="Image 1" descr="preencoded.png">    </p:cNvPr>
+          <p:cNvPicPr>
+            <a:picLocks noChangeAspect="1"/>
+          </p:cNvPicPr>
+          <p:nvPr/>
+        </p:nvPicPr>
+        <p:blipFill>
+          <a:blip r:embed="rId2"/>
+          <a:stretch>
+            <a:fillRect/>
+          </a:stretch>
+        </p:blipFill>
+        <p:spPr>
+          <a:xfrm>
+            <a:off x="9818319" y="128016"/>
+            <a:ext cx="201168" cy="201168"/>
+          </a:xfrm>
+          <a:prstGeom prst="rect">
+            <a:avLst/>
+          </a:prstGeom>
+        </p:spPr>
+      </p:pic>
+      <p:sp>
+        <p:nvSpPr>
+          <p:cNvPr id="20" name="Text 16"/>
+          <p:cNvSpPr txBox="1"/>
+          <p:nvPr/>
+        </p:nvSpPr>
+        <p:spPr>
+          <a:xfrm>
+            <a:off x="10074351" y="91440"/>
+            <a:ext cx="1532128" cy="274320"/>
+          </a:xfrm>
+          <a:prstGeom prst="rect">
+            <a:avLst/>
+          </a:prstGeom>
+          <a:noFill/>
+          <a:ln/>
+        </p:spPr>
+        <p:txBody>
+          <a:bodyPr wrap="square" lIns="0" tIns="0" rIns="0" bIns="0" rtlCol="0" anchor="ctr"/>
+          <a:lstStyle/>
+          <a:p>
+            <a:pPr indent="0" marL="0">
+              <a:buNone/>
+            </a:pPr>
+            <a:r>
+              <a:rPr lang="en-US" sz="1100" b="1" dirty="0">
+                <a:solidFill>
+                  <a:srgbClr val="6B21A8"/>
+                </a:solidFill>
+                <a:latin typeface="Calibri" pitchFamily="34" charset="0"/>
+                <a:ea typeface="Calibri" pitchFamily="34" charset="-122"/>
+                <a:cs typeface="Calibri" pitchFamily="34" charset="-120"/>
+              </a:rPr>
+              <a:t>UNDERSTAND LATER</a:t>
+            </a:r>
+            <a:endParaRPr lang="en-US" sz="1100" dirty="0"/>
+          </a:p>
+        </p:txBody>
+      </p:sp>
+      <p:sp>
+        <p:nvSpPr>
+          <p:cNvPr id="21" name="Shape 17"/>
+          <p:cNvSpPr/>
+          <p:nvPr/>
+        </p:nvSpPr>
+        <p:spPr>
+          <a:xfrm>
+            <a:off x="8407349" y="91440"/>
+            <a:ext cx="1173226" cy="274320"/>
+          </a:xfrm>
+          <a:prstGeom prst="rect">
+            <a:avLst/>
+          </a:prstGeom>
+          <a:solidFill>
+            <a:srgbClr val="FEF3C7"/>
+          </a:solidFill>
+          <a:ln w="12700">
+            <a:solidFill>
+              <a:srgbClr val="B45309"/>
+            </a:solidFill>
+            <a:prstDash val="solid"/>
+          </a:ln>
+        </p:spPr>
+      </p:sp>
+      <p:sp>
+        <p:nvSpPr>
+          <p:cNvPr id="22" name="Shape 18"/>
+          <p:cNvSpPr/>
+          <p:nvPr/>
+        </p:nvSpPr>
+        <p:spPr>
+          <a:xfrm>
+            <a:off x="8407349" y="91440"/>
+            <a:ext cx="27432" cy="274320"/>
+          </a:xfrm>
+          <a:prstGeom prst="rect">
+            <a:avLst/>
+          </a:prstGeom>
+          <a:solidFill>
+            <a:srgbClr val="B45309"/>
+          </a:solidFill>
+          <a:ln w="12700">
+            <a:solidFill>
+              <a:srgbClr val="B45309"/>
+            </a:solidFill>
+            <a:prstDash val="solid"/>
+          </a:ln>
+        </p:spPr>
+      </p:sp>
+      <p:sp>
+        <p:nvSpPr>
+          <p:cNvPr id="23" name="Shape 19"/>
+          <p:cNvSpPr/>
+          <p:nvPr/>
+        </p:nvSpPr>
+        <p:spPr>
+          <a:xfrm>
+            <a:off x="8462213" y="91440"/>
+            <a:ext cx="27432" cy="274320"/>
+          </a:xfrm>
+          <a:prstGeom prst="rect">
+            <a:avLst/>
+          </a:prstGeom>
+          <a:solidFill>
+            <a:srgbClr val="B45309"/>
+          </a:solidFill>
+          <a:ln w="12700">
+            <a:solidFill>
+              <a:srgbClr val="B45309"/>
+            </a:solidFill>
+            <a:prstDash val="solid"/>
+          </a:ln>
+        </p:spPr>
+      </p:sp>
+      <p:pic>
+        <p:nvPicPr>
+          <p:cNvPr id="24" name="Image 2" descr="preencoded.png">    </p:cNvPr>
+          <p:cNvPicPr>
+            <a:picLocks noChangeAspect="1"/>
+          </p:cNvPicPr>
+          <p:nvPr/>
+        </p:nvPicPr>
+        <p:blipFill>
+          <a:blip r:embed="rId3"/>
+          <a:stretch>
+            <a:fillRect/>
+          </a:stretch>
+        </p:blipFill>
+        <p:spPr>
+          <a:xfrm>
+            <a:off x="8535365" y="128016"/>
+            <a:ext cx="201168" cy="201168"/>
+          </a:xfrm>
+          <a:prstGeom prst="rect">
+            <a:avLst/>
+          </a:prstGeom>
+        </p:spPr>
+      </p:pic>
+      <p:sp>
+        <p:nvSpPr>
+          <p:cNvPr id="25" name="Text 20"/>
+          <p:cNvSpPr txBox="1"/>
+          <p:nvPr/>
+        </p:nvSpPr>
+        <p:spPr>
+          <a:xfrm>
+            <a:off x="8791397" y="91440"/>
+            <a:ext cx="752602" cy="274320"/>
+          </a:xfrm>
+          <a:prstGeom prst="rect">
+            <a:avLst/>
+          </a:prstGeom>
+          <a:noFill/>
+          <a:ln/>
+        </p:spPr>
+        <p:txBody>
+          <a:bodyPr wrap="square" lIns="0" tIns="0" rIns="0" bIns="0" rtlCol="0" anchor="ctr"/>
+          <a:lstStyle/>
+          <a:p>
+            <a:pPr indent="0" marL="0">
+              <a:buNone/>
+            </a:pPr>
+            <a:r>
+              <a:rPr lang="en-US" sz="1100" b="1" dirty="0">
+                <a:solidFill>
+                  <a:srgbClr val="92400E"/>
+                </a:solidFill>
+                <a:latin typeface="Calibri" pitchFamily="34" charset="0"/>
+                <a:ea typeface="Calibri" pitchFamily="34" charset="-122"/>
+                <a:cs typeface="Calibri" pitchFamily="34" charset="-120"/>
+              </a:rPr>
+              <a:t>USE NOW</a:t>
+            </a:r>
+            <a:endParaRPr lang="en-US" sz="1100" dirty="0"/>
+          </a:p>
+        </p:txBody>
+      </p:sp>
+      <p:sp>
+        <p:nvSpPr>
+          <p:cNvPr id="26" name="Shape 21"/>
+          <p:cNvSpPr/>
+          <p:nvPr/>
+        </p:nvSpPr>
+        <p:spPr>
+          <a:xfrm>
+            <a:off x="6518097" y="91440"/>
+            <a:ext cx="1779524" cy="274320"/>
+          </a:xfrm>
+          <a:prstGeom prst="rect">
+            <a:avLst/>
+          </a:prstGeom>
+          <a:solidFill>
+            <a:srgbClr val="E0F2FE"/>
+          </a:solidFill>
+          <a:ln w="12700">
+            <a:solidFill>
+              <a:srgbClr val="0369A1"/>
+            </a:solidFill>
+            <a:prstDash val="solid"/>
+          </a:ln>
+        </p:spPr>
+      </p:sp>
+      <p:sp>
+        <p:nvSpPr>
+          <p:cNvPr id="27" name="Shape 22"/>
+          <p:cNvSpPr/>
+          <p:nvPr/>
+        </p:nvSpPr>
+        <p:spPr>
+          <a:xfrm>
+            <a:off x="6518097" y="91440"/>
+            <a:ext cx="73152" cy="274320"/>
+          </a:xfrm>
+          <a:prstGeom prst="rect">
+            <a:avLst/>
+          </a:prstGeom>
+          <a:solidFill>
+            <a:srgbClr val="0369A1"/>
+          </a:solidFill>
+          <a:ln w="12700">
+            <a:solidFill>
+              <a:srgbClr val="0369A1"/>
+            </a:solidFill>
+            <a:prstDash val="solid"/>
+          </a:ln>
+        </p:spPr>
+      </p:sp>
+      <p:pic>
+        <p:nvPicPr>
+          <p:cNvPr id="28" name="Image 3" descr="preencoded.png">    </p:cNvPr>
+          <p:cNvPicPr>
+            <a:picLocks noChangeAspect="1"/>
+          </p:cNvPicPr>
+          <p:nvPr/>
+        </p:nvPicPr>
+        <p:blipFill>
+          <a:blip r:embed="rId4"/>
+          <a:stretch>
+            <a:fillRect/>
+          </a:stretch>
+        </p:blipFill>
+        <p:spPr>
+          <a:xfrm>
+            <a:off x="6646113" y="128016"/>
+            <a:ext cx="201168" cy="201168"/>
+          </a:xfrm>
+          <a:prstGeom prst="rect">
+            <a:avLst/>
+          </a:prstGeom>
+        </p:spPr>
+      </p:pic>
+      <p:sp>
+        <p:nvSpPr>
+          <p:cNvPr id="29" name="Text 23"/>
+          <p:cNvSpPr txBox="1"/>
+          <p:nvPr/>
+        </p:nvSpPr>
+        <p:spPr>
+          <a:xfrm>
+            <a:off x="6902145" y="91440"/>
+            <a:ext cx="1358900" cy="274320"/>
+          </a:xfrm>
+          <a:prstGeom prst="rect">
+            <a:avLst/>
+          </a:prstGeom>
+          <a:noFill/>
+          <a:ln/>
+        </p:spPr>
+        <p:txBody>
+          <a:bodyPr wrap="square" lIns="0" tIns="0" rIns="0" bIns="0" rtlCol="0" anchor="ctr"/>
+          <a:lstStyle/>
+          <a:p>
+            <a:pPr indent="0" marL="0">
+              <a:buNone/>
+            </a:pPr>
+            <a:r>
+              <a:rPr lang="en-US" sz="1100" b="1" dirty="0">
+                <a:solidFill>
+                  <a:srgbClr val="075985"/>
+                </a:solidFill>
+                <a:latin typeface="Calibri" pitchFamily="34" charset="0"/>
+                <a:ea typeface="Calibri" pitchFamily="34" charset="-122"/>
+                <a:cs typeface="Calibri" pitchFamily="34" charset="-120"/>
+              </a:rPr>
+              <a:t>UNDERSTAND NOW</a:t>
+            </a:r>
+            <a:endParaRPr lang="en-US" sz="1100" dirty="0"/>
+          </a:p>
+        </p:txBody>
+      </p:sp>
+      <p:sp>
+        <p:nvSpPr>
           <p:cNvPr id="25" name="Slide Number Placeholder 0"/>
           <p:cNvSpPr>
             <a:spLocks noGrp="1"/>
@@ -6922,6 +7364,133 @@
       </p:sp>
       <p:sp>
         <p:nvSpPr>
+          <p:cNvPr id="14" name="Shape 12"/>
+          <p:cNvSpPr/>
+          <p:nvPr/>
+        </p:nvSpPr>
+        <p:spPr>
+          <a:xfrm>
+            <a:off x="8222056" y="91440"/>
+            <a:ext cx="3420999" cy="274320"/>
+          </a:xfrm>
+          <a:prstGeom prst="rect">
+            <a:avLst/>
+          </a:prstGeom>
+          <a:solidFill>
+            <a:srgbClr val="E0F2FE"/>
+          </a:solidFill>
+          <a:ln w="12700">
+            <a:solidFill>
+              <a:srgbClr val="0369A1"/>
+            </a:solidFill>
+            <a:prstDash val="solid"/>
+          </a:ln>
+        </p:spPr>
+      </p:sp>
+      <p:sp>
+        <p:nvSpPr>
+          <p:cNvPr id="15" name="Shape 13"/>
+          <p:cNvSpPr/>
+          <p:nvPr/>
+        </p:nvSpPr>
+        <p:spPr>
+          <a:xfrm>
+            <a:off x="8222056" y="91440"/>
+            <a:ext cx="73152" cy="274320"/>
+          </a:xfrm>
+          <a:prstGeom prst="rect">
+            <a:avLst/>
+          </a:prstGeom>
+          <a:solidFill>
+            <a:srgbClr val="0369A1"/>
+          </a:solidFill>
+          <a:ln w="12700">
+            <a:solidFill>
+              <a:srgbClr val="0369A1"/>
+            </a:solidFill>
+            <a:prstDash val="solid"/>
+          </a:ln>
+        </p:spPr>
+      </p:sp>
+      <p:pic>
+        <p:nvPicPr>
+          <p:cNvPr id="16" name="Image 0" descr="preencoded.png">    </p:cNvPr>
+          <p:cNvPicPr>
+            <a:picLocks noChangeAspect="1"/>
+          </p:cNvPicPr>
+          <p:nvPr/>
+        </p:nvPicPr>
+        <p:blipFill>
+          <a:blip r:embed="rId1"/>
+          <a:stretch>
+            <a:fillRect/>
+          </a:stretch>
+        </p:blipFill>
+        <p:spPr>
+          <a:xfrm>
+            <a:off x="8350072" y="128016"/>
+            <a:ext cx="201168" cy="201168"/>
+          </a:xfrm>
+          <a:prstGeom prst="rect">
+            <a:avLst/>
+          </a:prstGeom>
+        </p:spPr>
+      </p:pic>
+      <p:sp>
+        <p:nvSpPr>
+          <p:cNvPr id="17" name="Text 14"/>
+          <p:cNvSpPr txBox="1"/>
+          <p:nvPr/>
+        </p:nvSpPr>
+        <p:spPr>
+          <a:xfrm>
+            <a:off x="8606104" y="91440"/>
+            <a:ext cx="3000375" cy="274320"/>
+          </a:xfrm>
+          <a:prstGeom prst="rect">
+            <a:avLst/>
+          </a:prstGeom>
+          <a:noFill/>
+          <a:ln/>
+        </p:spPr>
+        <p:txBody>
+          <a:bodyPr wrap="square" lIns="0" tIns="0" rIns="0" bIns="0" rtlCol="0" anchor="ctr"/>
+          <a:lstStyle/>
+          <a:p>
+            <a:pPr indent="0" marL="0">
+              <a:buNone/>
+            </a:pPr>
+            <a:r>
+              <a:rPr lang="en-US" sz="1100" b="1" dirty="0">
+                <a:solidFill>
+                  <a:srgbClr val="075985"/>
+                </a:solidFill>
+                <a:latin typeface="Calibri" pitchFamily="34" charset="0"/>
+                <a:ea typeface="Calibri" pitchFamily="34" charset="-122"/>
+                <a:cs typeface="Calibri" pitchFamily="34" charset="-120"/>
+              </a:rPr>
+              <a:t>UNDERSTAND NOW</a:t>
+            </a:r>
+            <a:pPr indent="0" marL="0">
+              <a:buNone/>
+            </a:pPr>
+            <a:r>
+              <a:rPr lang="en-US" sz="1100" dirty="0">
+                <a:solidFill>
+                  <a:srgbClr val="075985"/>
+                </a:solidFill>
+                <a:latin typeface="Calibri" pitchFamily="34" charset="0"/>
+                <a:ea typeface="Calibri" pitchFamily="34" charset="-122"/>
+                <a:cs typeface="Calibri" pitchFamily="34" charset="-120"/>
+              </a:rPr>
+              <a:t> · the calling convention</a:t>
+            </a:r>
+            <a:endParaRPr lang="en-US" sz="1100" dirty="0"/>
+          </a:p>
+        </p:txBody>
+      </p:sp>
+      <p:sp>
+        <p:nvSpPr>
           <p:cNvPr id="25" name="Slide Number Placeholder 0"/>
           <p:cNvSpPr>
             <a:spLocks noGrp="1"/>
@@ -7905,6 +8474,133 @@
       </p:sp>
       <p:sp>
         <p:nvSpPr>
+          <p:cNvPr id="14" name="Shape 12"/>
+          <p:cNvSpPr/>
+          <p:nvPr/>
+        </p:nvSpPr>
+        <p:spPr>
+          <a:xfrm>
+            <a:off x="8616010" y="91440"/>
+            <a:ext cx="3027045" cy="274320"/>
+          </a:xfrm>
+          <a:prstGeom prst="rect">
+            <a:avLst/>
+          </a:prstGeom>
+          <a:solidFill>
+            <a:srgbClr val="E0F2FE"/>
+          </a:solidFill>
+          <a:ln w="12700">
+            <a:solidFill>
+              <a:srgbClr val="0369A1"/>
+            </a:solidFill>
+            <a:prstDash val="solid"/>
+          </a:ln>
+        </p:spPr>
+      </p:sp>
+      <p:sp>
+        <p:nvSpPr>
+          <p:cNvPr id="15" name="Shape 13"/>
+          <p:cNvSpPr/>
+          <p:nvPr/>
+        </p:nvSpPr>
+        <p:spPr>
+          <a:xfrm>
+            <a:off x="8616010" y="91440"/>
+            <a:ext cx="73152" cy="274320"/>
+          </a:xfrm>
+          <a:prstGeom prst="rect">
+            <a:avLst/>
+          </a:prstGeom>
+          <a:solidFill>
+            <a:srgbClr val="0369A1"/>
+          </a:solidFill>
+          <a:ln w="12700">
+            <a:solidFill>
+              <a:srgbClr val="0369A1"/>
+            </a:solidFill>
+            <a:prstDash val="solid"/>
+          </a:ln>
+        </p:spPr>
+      </p:sp>
+      <p:pic>
+        <p:nvPicPr>
+          <p:cNvPr id="16" name="Image 0" descr="preencoded.png">    </p:cNvPr>
+          <p:cNvPicPr>
+            <a:picLocks noChangeAspect="1"/>
+          </p:cNvPicPr>
+          <p:nvPr/>
+        </p:nvPicPr>
+        <p:blipFill>
+          <a:blip r:embed="rId1"/>
+          <a:stretch>
+            <a:fillRect/>
+          </a:stretch>
+        </p:blipFill>
+        <p:spPr>
+          <a:xfrm>
+            <a:off x="8744026" y="128016"/>
+            <a:ext cx="201168" cy="201168"/>
+          </a:xfrm>
+          <a:prstGeom prst="rect">
+            <a:avLst/>
+          </a:prstGeom>
+        </p:spPr>
+      </p:pic>
+      <p:sp>
+        <p:nvSpPr>
+          <p:cNvPr id="17" name="Text 14"/>
+          <p:cNvSpPr txBox="1"/>
+          <p:nvPr/>
+        </p:nvSpPr>
+        <p:spPr>
+          <a:xfrm>
+            <a:off x="9000058" y="91440"/>
+            <a:ext cx="2606421" cy="274320"/>
+          </a:xfrm>
+          <a:prstGeom prst="rect">
+            <a:avLst/>
+          </a:prstGeom>
+          <a:noFill/>
+          <a:ln/>
+        </p:spPr>
+        <p:txBody>
+          <a:bodyPr wrap="square" lIns="0" tIns="0" rIns="0" bIns="0" rtlCol="0" anchor="ctr"/>
+          <a:lstStyle/>
+          <a:p>
+            <a:pPr indent="0" marL="0">
+              <a:buNone/>
+            </a:pPr>
+            <a:r>
+              <a:rPr lang="en-US" sz="1100" b="1" dirty="0">
+                <a:solidFill>
+                  <a:srgbClr val="075985"/>
+                </a:solidFill>
+                <a:latin typeface="Calibri" pitchFamily="34" charset="0"/>
+                <a:ea typeface="Calibri" pitchFamily="34" charset="-122"/>
+                <a:cs typeface="Calibri" pitchFamily="34" charset="-120"/>
+              </a:rPr>
+              <a:t>UNDERSTAND NOW</a:t>
+            </a:r>
+            <a:pPr indent="0" marL="0">
+              <a:buNone/>
+            </a:pPr>
+            <a:r>
+              <a:rPr lang="en-US" sz="1100" dirty="0">
+                <a:solidFill>
+                  <a:srgbClr val="075985"/>
+                </a:solidFill>
+                <a:latin typeface="Calibri" pitchFamily="34" charset="0"/>
+                <a:ea typeface="Calibri" pitchFamily="34" charset="-122"/>
+                <a:cs typeface="Calibri" pitchFamily="34" charset="-120"/>
+              </a:rPr>
+              <a:t> · arrays in memory</a:t>
+            </a:r>
+            <a:endParaRPr lang="en-US" sz="1100" dirty="0"/>
+          </a:p>
+        </p:txBody>
+      </p:sp>
+      <p:sp>
+        <p:nvSpPr>
           <p:cNvPr id="25" name="Slide Number Placeholder 0"/>
           <p:cNvSpPr>
             <a:spLocks noGrp="1"/>
@@ -8854,6 +9550,133 @@
       </p:sp>
       <p:sp>
         <p:nvSpPr>
+          <p:cNvPr id="11" name="Shape 9"/>
+          <p:cNvSpPr/>
+          <p:nvPr/>
+        </p:nvSpPr>
+        <p:spPr>
+          <a:xfrm>
+            <a:off x="8616010" y="91440"/>
+            <a:ext cx="3027045" cy="274320"/>
+          </a:xfrm>
+          <a:prstGeom prst="rect">
+            <a:avLst/>
+          </a:prstGeom>
+          <a:solidFill>
+            <a:srgbClr val="E0F2FE"/>
+          </a:solidFill>
+          <a:ln w="12700">
+            <a:solidFill>
+              <a:srgbClr val="0369A1"/>
+            </a:solidFill>
+            <a:prstDash val="solid"/>
+          </a:ln>
+        </p:spPr>
+      </p:sp>
+      <p:sp>
+        <p:nvSpPr>
+          <p:cNvPr id="12" name="Shape 10"/>
+          <p:cNvSpPr/>
+          <p:nvPr/>
+        </p:nvSpPr>
+        <p:spPr>
+          <a:xfrm>
+            <a:off x="8616010" y="91440"/>
+            <a:ext cx="73152" cy="274320"/>
+          </a:xfrm>
+          <a:prstGeom prst="rect">
+            <a:avLst/>
+          </a:prstGeom>
+          <a:solidFill>
+            <a:srgbClr val="0369A1"/>
+          </a:solidFill>
+          <a:ln w="12700">
+            <a:solidFill>
+              <a:srgbClr val="0369A1"/>
+            </a:solidFill>
+            <a:prstDash val="solid"/>
+          </a:ln>
+        </p:spPr>
+      </p:sp>
+      <p:pic>
+        <p:nvPicPr>
+          <p:cNvPr id="13" name="Image 0" descr="preencoded.png">    </p:cNvPr>
+          <p:cNvPicPr>
+            <a:picLocks noChangeAspect="1"/>
+          </p:cNvPicPr>
+          <p:nvPr/>
+        </p:nvPicPr>
+        <p:blipFill>
+          <a:blip r:embed="rId1"/>
+          <a:stretch>
+            <a:fillRect/>
+          </a:stretch>
+        </p:blipFill>
+        <p:spPr>
+          <a:xfrm>
+            <a:off x="8744026" y="128016"/>
+            <a:ext cx="201168" cy="201168"/>
+          </a:xfrm>
+          <a:prstGeom prst="rect">
+            <a:avLst/>
+          </a:prstGeom>
+        </p:spPr>
+      </p:pic>
+      <p:sp>
+        <p:nvSpPr>
+          <p:cNvPr id="14" name="Text 11"/>
+          <p:cNvSpPr txBox="1"/>
+          <p:nvPr/>
+        </p:nvSpPr>
+        <p:spPr>
+          <a:xfrm>
+            <a:off x="9000058" y="91440"/>
+            <a:ext cx="2606421" cy="274320"/>
+          </a:xfrm>
+          <a:prstGeom prst="rect">
+            <a:avLst/>
+          </a:prstGeom>
+          <a:noFill/>
+          <a:ln/>
+        </p:spPr>
+        <p:txBody>
+          <a:bodyPr wrap="square" lIns="0" tIns="0" rIns="0" bIns="0" rtlCol="0" anchor="ctr"/>
+          <a:lstStyle/>
+          <a:p>
+            <a:pPr indent="0" marL="0">
+              <a:buNone/>
+            </a:pPr>
+            <a:r>
+              <a:rPr lang="en-US" sz="1100" b="1" dirty="0">
+                <a:solidFill>
+                  <a:srgbClr val="075985"/>
+                </a:solidFill>
+                <a:latin typeface="Calibri" pitchFamily="34" charset="0"/>
+                <a:ea typeface="Calibri" pitchFamily="34" charset="-122"/>
+                <a:cs typeface="Calibri" pitchFamily="34" charset="-120"/>
+              </a:rPr>
+              <a:t>UNDERSTAND NOW</a:t>
+            </a:r>
+            <a:pPr indent="0" marL="0">
+              <a:buNone/>
+            </a:pPr>
+            <a:r>
+              <a:rPr lang="en-US" sz="1100" dirty="0">
+                <a:solidFill>
+                  <a:srgbClr val="075985"/>
+                </a:solidFill>
+                <a:latin typeface="Calibri" pitchFamily="34" charset="0"/>
+                <a:ea typeface="Calibri" pitchFamily="34" charset="-122"/>
+                <a:cs typeface="Calibri" pitchFamily="34" charset="-120"/>
+              </a:rPr>
+              <a:t> · arrays in memory</a:t>
+            </a:r>
+            <a:endParaRPr lang="en-US" sz="1100" dirty="0"/>
+          </a:p>
+        </p:txBody>
+      </p:sp>
+      <p:sp>
+        <p:nvSpPr>
           <p:cNvPr id="25" name="Slide Number Placeholder 0"/>
           <p:cNvSpPr>
             <a:spLocks noGrp="1"/>
@@ -9814,6 +10637,133 @@
       </p:sp>
       <p:sp>
         <p:nvSpPr>
+          <p:cNvPr id="14" name="Shape 12"/>
+          <p:cNvSpPr/>
+          <p:nvPr/>
+        </p:nvSpPr>
+        <p:spPr>
+          <a:xfrm>
+            <a:off x="8616010" y="91440"/>
+            <a:ext cx="3027045" cy="274320"/>
+          </a:xfrm>
+          <a:prstGeom prst="rect">
+            <a:avLst/>
+          </a:prstGeom>
+          <a:solidFill>
+            <a:srgbClr val="E0F2FE"/>
+          </a:solidFill>
+          <a:ln w="12700">
+            <a:solidFill>
+              <a:srgbClr val="0369A1"/>
+            </a:solidFill>
+            <a:prstDash val="solid"/>
+          </a:ln>
+        </p:spPr>
+      </p:sp>
+      <p:sp>
+        <p:nvSpPr>
+          <p:cNvPr id="15" name="Shape 13"/>
+          <p:cNvSpPr/>
+          <p:nvPr/>
+        </p:nvSpPr>
+        <p:spPr>
+          <a:xfrm>
+            <a:off x="8616010" y="91440"/>
+            <a:ext cx="73152" cy="274320"/>
+          </a:xfrm>
+          <a:prstGeom prst="rect">
+            <a:avLst/>
+          </a:prstGeom>
+          <a:solidFill>
+            <a:srgbClr val="0369A1"/>
+          </a:solidFill>
+          <a:ln w="12700">
+            <a:solidFill>
+              <a:srgbClr val="0369A1"/>
+            </a:solidFill>
+            <a:prstDash val="solid"/>
+          </a:ln>
+        </p:spPr>
+      </p:sp>
+      <p:pic>
+        <p:nvPicPr>
+          <p:cNvPr id="16" name="Image 0" descr="preencoded.png">    </p:cNvPr>
+          <p:cNvPicPr>
+            <a:picLocks noChangeAspect="1"/>
+          </p:cNvPicPr>
+          <p:nvPr/>
+        </p:nvPicPr>
+        <p:blipFill>
+          <a:blip r:embed="rId1"/>
+          <a:stretch>
+            <a:fillRect/>
+          </a:stretch>
+        </p:blipFill>
+        <p:spPr>
+          <a:xfrm>
+            <a:off x="8744026" y="128016"/>
+            <a:ext cx="201168" cy="201168"/>
+          </a:xfrm>
+          <a:prstGeom prst="rect">
+            <a:avLst/>
+          </a:prstGeom>
+        </p:spPr>
+      </p:pic>
+      <p:sp>
+        <p:nvSpPr>
+          <p:cNvPr id="17" name="Text 14"/>
+          <p:cNvSpPr txBox="1"/>
+          <p:nvPr/>
+        </p:nvSpPr>
+        <p:spPr>
+          <a:xfrm>
+            <a:off x="9000058" y="91440"/>
+            <a:ext cx="2606421" cy="274320"/>
+          </a:xfrm>
+          <a:prstGeom prst="rect">
+            <a:avLst/>
+          </a:prstGeom>
+          <a:noFill/>
+          <a:ln/>
+        </p:spPr>
+        <p:txBody>
+          <a:bodyPr wrap="square" lIns="0" tIns="0" rIns="0" bIns="0" rtlCol="0" anchor="ctr"/>
+          <a:lstStyle/>
+          <a:p>
+            <a:pPr indent="0" marL="0">
+              <a:buNone/>
+            </a:pPr>
+            <a:r>
+              <a:rPr lang="en-US" sz="1100" b="1" dirty="0">
+                <a:solidFill>
+                  <a:srgbClr val="075985"/>
+                </a:solidFill>
+                <a:latin typeface="Calibri" pitchFamily="34" charset="0"/>
+                <a:ea typeface="Calibri" pitchFamily="34" charset="-122"/>
+                <a:cs typeface="Calibri" pitchFamily="34" charset="-120"/>
+              </a:rPr>
+              <a:t>UNDERSTAND NOW</a:t>
+            </a:r>
+            <a:pPr indent="0" marL="0">
+              <a:buNone/>
+            </a:pPr>
+            <a:r>
+              <a:rPr lang="en-US" sz="1100" dirty="0">
+                <a:solidFill>
+                  <a:srgbClr val="075985"/>
+                </a:solidFill>
+                <a:latin typeface="Calibri" pitchFamily="34" charset="0"/>
+                <a:ea typeface="Calibri" pitchFamily="34" charset="-122"/>
+                <a:cs typeface="Calibri" pitchFamily="34" charset="-120"/>
+              </a:rPr>
+              <a:t> · arrays in memory</a:t>
+            </a:r>
+            <a:endParaRPr lang="en-US" sz="1100" dirty="0"/>
+          </a:p>
+        </p:txBody>
+      </p:sp>
+      <p:sp>
+        <p:nvSpPr>
           <p:cNvPr id="25" name="Slide Number Placeholder 0"/>
           <p:cNvSpPr>
             <a:spLocks noGrp="1"/>
@@ -10466,6 +11416,133 @@
       </p:sp>
       <p:sp>
         <p:nvSpPr>
+          <p:cNvPr id="11" name="Shape 9"/>
+          <p:cNvSpPr/>
+          <p:nvPr/>
+        </p:nvSpPr>
+        <p:spPr>
+          <a:xfrm>
+            <a:off x="8616010" y="91440"/>
+            <a:ext cx="3027045" cy="274320"/>
+          </a:xfrm>
+          <a:prstGeom prst="rect">
+            <a:avLst/>
+          </a:prstGeom>
+          <a:solidFill>
+            <a:srgbClr val="E0F2FE"/>
+          </a:solidFill>
+          <a:ln w="12700">
+            <a:solidFill>
+              <a:srgbClr val="0369A1"/>
+            </a:solidFill>
+            <a:prstDash val="solid"/>
+          </a:ln>
+        </p:spPr>
+      </p:sp>
+      <p:sp>
+        <p:nvSpPr>
+          <p:cNvPr id="12" name="Shape 10"/>
+          <p:cNvSpPr/>
+          <p:nvPr/>
+        </p:nvSpPr>
+        <p:spPr>
+          <a:xfrm>
+            <a:off x="8616010" y="91440"/>
+            <a:ext cx="73152" cy="274320"/>
+          </a:xfrm>
+          <a:prstGeom prst="rect">
+            <a:avLst/>
+          </a:prstGeom>
+          <a:solidFill>
+            <a:srgbClr val="0369A1"/>
+          </a:solidFill>
+          <a:ln w="12700">
+            <a:solidFill>
+              <a:srgbClr val="0369A1"/>
+            </a:solidFill>
+            <a:prstDash val="solid"/>
+          </a:ln>
+        </p:spPr>
+      </p:sp>
+      <p:pic>
+        <p:nvPicPr>
+          <p:cNvPr id="13" name="Image 0" descr="preencoded.png">    </p:cNvPr>
+          <p:cNvPicPr>
+            <a:picLocks noChangeAspect="1"/>
+          </p:cNvPicPr>
+          <p:nvPr/>
+        </p:nvPicPr>
+        <p:blipFill>
+          <a:blip r:embed="rId1"/>
+          <a:stretch>
+            <a:fillRect/>
+          </a:stretch>
+        </p:blipFill>
+        <p:spPr>
+          <a:xfrm>
+            <a:off x="8744026" y="128016"/>
+            <a:ext cx="201168" cy="201168"/>
+          </a:xfrm>
+          <a:prstGeom prst="rect">
+            <a:avLst/>
+          </a:prstGeom>
+        </p:spPr>
+      </p:pic>
+      <p:sp>
+        <p:nvSpPr>
+          <p:cNvPr id="14" name="Text 11"/>
+          <p:cNvSpPr txBox="1"/>
+          <p:nvPr/>
+        </p:nvSpPr>
+        <p:spPr>
+          <a:xfrm>
+            <a:off x="9000058" y="91440"/>
+            <a:ext cx="2606421" cy="274320"/>
+          </a:xfrm>
+          <a:prstGeom prst="rect">
+            <a:avLst/>
+          </a:prstGeom>
+          <a:noFill/>
+          <a:ln/>
+        </p:spPr>
+        <p:txBody>
+          <a:bodyPr wrap="square" lIns="0" tIns="0" rIns="0" bIns="0" rtlCol="0" anchor="ctr"/>
+          <a:lstStyle/>
+          <a:p>
+            <a:pPr indent="0" marL="0">
+              <a:buNone/>
+            </a:pPr>
+            <a:r>
+              <a:rPr lang="en-US" sz="1100" b="1" dirty="0">
+                <a:solidFill>
+                  <a:srgbClr val="075985"/>
+                </a:solidFill>
+                <a:latin typeface="Calibri" pitchFamily="34" charset="0"/>
+                <a:ea typeface="Calibri" pitchFamily="34" charset="-122"/>
+                <a:cs typeface="Calibri" pitchFamily="34" charset="-120"/>
+              </a:rPr>
+              <a:t>UNDERSTAND NOW</a:t>
+            </a:r>
+            <a:pPr indent="0" marL="0">
+              <a:buNone/>
+            </a:pPr>
+            <a:r>
+              <a:rPr lang="en-US" sz="1100" dirty="0">
+                <a:solidFill>
+                  <a:srgbClr val="075985"/>
+                </a:solidFill>
+                <a:latin typeface="Calibri" pitchFamily="34" charset="0"/>
+                <a:ea typeface="Calibri" pitchFamily="34" charset="-122"/>
+                <a:cs typeface="Calibri" pitchFamily="34" charset="-120"/>
+              </a:rPr>
+              <a:t> · arrays in memory</a:t>
+            </a:r>
+            <a:endParaRPr lang="en-US" sz="1100" dirty="0"/>
+          </a:p>
+        </p:txBody>
+      </p:sp>
+      <p:sp>
+        <p:nvSpPr>
           <p:cNvPr id="25" name="Slide Number Placeholder 0"/>
           <p:cNvSpPr>
             <a:spLocks noGrp="1"/>
@@ -11302,6 +12379,133 @@
       </p:sp>
       <p:sp>
         <p:nvSpPr>
+          <p:cNvPr id="14" name="Shape 12"/>
+          <p:cNvSpPr/>
+          <p:nvPr/>
+        </p:nvSpPr>
+        <p:spPr>
+          <a:xfrm>
+            <a:off x="8222056" y="91440"/>
+            <a:ext cx="3420999" cy="274320"/>
+          </a:xfrm>
+          <a:prstGeom prst="rect">
+            <a:avLst/>
+          </a:prstGeom>
+          <a:solidFill>
+            <a:srgbClr val="E0F2FE"/>
+          </a:solidFill>
+          <a:ln w="12700">
+            <a:solidFill>
+              <a:srgbClr val="0369A1"/>
+            </a:solidFill>
+            <a:prstDash val="solid"/>
+          </a:ln>
+        </p:spPr>
+      </p:sp>
+      <p:sp>
+        <p:nvSpPr>
+          <p:cNvPr id="15" name="Shape 13"/>
+          <p:cNvSpPr/>
+          <p:nvPr/>
+        </p:nvSpPr>
+        <p:spPr>
+          <a:xfrm>
+            <a:off x="8222056" y="91440"/>
+            <a:ext cx="73152" cy="274320"/>
+          </a:xfrm>
+          <a:prstGeom prst="rect">
+            <a:avLst/>
+          </a:prstGeom>
+          <a:solidFill>
+            <a:srgbClr val="0369A1"/>
+          </a:solidFill>
+          <a:ln w="12700">
+            <a:solidFill>
+              <a:srgbClr val="0369A1"/>
+            </a:solidFill>
+            <a:prstDash val="solid"/>
+          </a:ln>
+        </p:spPr>
+      </p:sp>
+      <p:pic>
+        <p:nvPicPr>
+          <p:cNvPr id="16" name="Image 0" descr="preencoded.png">    </p:cNvPr>
+          <p:cNvPicPr>
+            <a:picLocks noChangeAspect="1"/>
+          </p:cNvPicPr>
+          <p:nvPr/>
+        </p:nvPicPr>
+        <p:blipFill>
+          <a:blip r:embed="rId1"/>
+          <a:stretch>
+            <a:fillRect/>
+          </a:stretch>
+        </p:blipFill>
+        <p:spPr>
+          <a:xfrm>
+            <a:off x="8350072" y="128016"/>
+            <a:ext cx="201168" cy="201168"/>
+          </a:xfrm>
+          <a:prstGeom prst="rect">
+            <a:avLst/>
+          </a:prstGeom>
+        </p:spPr>
+      </p:pic>
+      <p:sp>
+        <p:nvSpPr>
+          <p:cNvPr id="17" name="Text 14"/>
+          <p:cNvSpPr txBox="1"/>
+          <p:nvPr/>
+        </p:nvSpPr>
+        <p:spPr>
+          <a:xfrm>
+            <a:off x="8606104" y="91440"/>
+            <a:ext cx="3000375" cy="274320"/>
+          </a:xfrm>
+          <a:prstGeom prst="rect">
+            <a:avLst/>
+          </a:prstGeom>
+          <a:noFill/>
+          <a:ln/>
+        </p:spPr>
+        <p:txBody>
+          <a:bodyPr wrap="square" lIns="0" tIns="0" rIns="0" bIns="0" rtlCol="0" anchor="ctr"/>
+          <a:lstStyle/>
+          <a:p>
+            <a:pPr indent="0" marL="0">
+              <a:buNone/>
+            </a:pPr>
+            <a:r>
+              <a:rPr lang="en-US" sz="1100" b="1" dirty="0">
+                <a:solidFill>
+                  <a:srgbClr val="075985"/>
+                </a:solidFill>
+                <a:latin typeface="Calibri" pitchFamily="34" charset="0"/>
+                <a:ea typeface="Calibri" pitchFamily="34" charset="-122"/>
+                <a:cs typeface="Calibri" pitchFamily="34" charset="-120"/>
+              </a:rPr>
+              <a:t>UNDERSTAND NOW</a:t>
+            </a:r>
+            <a:pPr indent="0" marL="0">
+              <a:buNone/>
+            </a:pPr>
+            <a:r>
+              <a:rPr lang="en-US" sz="1100" dirty="0">
+                <a:solidFill>
+                  <a:srgbClr val="075985"/>
+                </a:solidFill>
+                <a:latin typeface="Calibri" pitchFamily="34" charset="0"/>
+                <a:ea typeface="Calibri" pitchFamily="34" charset="-122"/>
+                <a:cs typeface="Calibri" pitchFamily="34" charset="-120"/>
+              </a:rPr>
+              <a:t> · the calling convention</a:t>
+            </a:r>
+            <a:endParaRPr lang="en-US" sz="1100" dirty="0"/>
+          </a:p>
+        </p:txBody>
+      </p:sp>
+      <p:sp>
+        <p:nvSpPr>
           <p:cNvPr id="25" name="Slide Number Placeholder 0"/>
           <p:cNvSpPr>
             <a:spLocks noGrp="1"/>
@@ -12217,6 +13421,133 @@
       </p:sp>
       <p:sp>
         <p:nvSpPr>
+          <p:cNvPr id="14" name="Shape 12"/>
+          <p:cNvSpPr/>
+          <p:nvPr/>
+        </p:nvSpPr>
+        <p:spPr>
+          <a:xfrm>
+            <a:off x="8287715" y="91440"/>
+            <a:ext cx="3355340" cy="274320"/>
+          </a:xfrm>
+          <a:prstGeom prst="rect">
+            <a:avLst/>
+          </a:prstGeom>
+          <a:solidFill>
+            <a:srgbClr val="E0F2FE"/>
+          </a:solidFill>
+          <a:ln w="12700">
+            <a:solidFill>
+              <a:srgbClr val="0369A1"/>
+            </a:solidFill>
+            <a:prstDash val="solid"/>
+          </a:ln>
+        </p:spPr>
+      </p:sp>
+      <p:sp>
+        <p:nvSpPr>
+          <p:cNvPr id="15" name="Shape 13"/>
+          <p:cNvSpPr/>
+          <p:nvPr/>
+        </p:nvSpPr>
+        <p:spPr>
+          <a:xfrm>
+            <a:off x="8287715" y="91440"/>
+            <a:ext cx="73152" cy="274320"/>
+          </a:xfrm>
+          <a:prstGeom prst="rect">
+            <a:avLst/>
+          </a:prstGeom>
+          <a:solidFill>
+            <a:srgbClr val="0369A1"/>
+          </a:solidFill>
+          <a:ln w="12700">
+            <a:solidFill>
+              <a:srgbClr val="0369A1"/>
+            </a:solidFill>
+            <a:prstDash val="solid"/>
+          </a:ln>
+        </p:spPr>
+      </p:sp>
+      <p:pic>
+        <p:nvPicPr>
+          <p:cNvPr id="16" name="Image 0" descr="preencoded.png">    </p:cNvPr>
+          <p:cNvPicPr>
+            <a:picLocks noChangeAspect="1"/>
+          </p:cNvPicPr>
+          <p:nvPr/>
+        </p:nvPicPr>
+        <p:blipFill>
+          <a:blip r:embed="rId1"/>
+          <a:stretch>
+            <a:fillRect/>
+          </a:stretch>
+        </p:blipFill>
+        <p:spPr>
+          <a:xfrm>
+            <a:off x="8415731" y="128016"/>
+            <a:ext cx="201168" cy="201168"/>
+          </a:xfrm>
+          <a:prstGeom prst="rect">
+            <a:avLst/>
+          </a:prstGeom>
+        </p:spPr>
+      </p:pic>
+      <p:sp>
+        <p:nvSpPr>
+          <p:cNvPr id="17" name="Text 14"/>
+          <p:cNvSpPr txBox="1"/>
+          <p:nvPr/>
+        </p:nvSpPr>
+        <p:spPr>
+          <a:xfrm>
+            <a:off x="8671763" y="91440"/>
+            <a:ext cx="2934716" cy="274320"/>
+          </a:xfrm>
+          <a:prstGeom prst="rect">
+            <a:avLst/>
+          </a:prstGeom>
+          <a:noFill/>
+          <a:ln/>
+        </p:spPr>
+        <p:txBody>
+          <a:bodyPr wrap="square" lIns="0" tIns="0" rIns="0" bIns="0" rtlCol="0" anchor="ctr"/>
+          <a:lstStyle/>
+          <a:p>
+            <a:pPr indent="0" marL="0">
+              <a:buNone/>
+            </a:pPr>
+            <a:r>
+              <a:rPr lang="en-US" sz="1100" b="1" dirty="0">
+                <a:solidFill>
+                  <a:srgbClr val="075985"/>
+                </a:solidFill>
+                <a:latin typeface="Calibri" pitchFamily="34" charset="0"/>
+                <a:ea typeface="Calibri" pitchFamily="34" charset="-122"/>
+                <a:cs typeface="Calibri" pitchFamily="34" charset="-120"/>
+              </a:rPr>
+              <a:t>UNDERSTAND NOW</a:t>
+            </a:r>
+            <a:pPr indent="0" marL="0">
+              <a:buNone/>
+            </a:pPr>
+            <a:r>
+              <a:rPr lang="en-US" sz="1100" dirty="0">
+                <a:solidFill>
+                  <a:srgbClr val="075985"/>
+                </a:solidFill>
+                <a:latin typeface="Calibri" pitchFamily="34" charset="0"/>
+                <a:ea typeface="Calibri" pitchFamily="34" charset="-122"/>
+                <a:cs typeface="Calibri" pitchFamily="34" charset="-120"/>
+              </a:rPr>
+              <a:t> · finite-state machines</a:t>
+            </a:r>
+            <a:endParaRPr lang="en-US" sz="1100" dirty="0"/>
+          </a:p>
+        </p:txBody>
+      </p:sp>
+      <p:sp>
+        <p:nvSpPr>
           <p:cNvPr id="25" name="Slide Number Placeholder 0"/>
           <p:cNvSpPr>
             <a:spLocks noGrp="1"/>
@@ -13751,6 +15082,133 @@
       </p:sp>
       <p:sp>
         <p:nvSpPr>
+          <p:cNvPr id="17" name="Shape 15"/>
+          <p:cNvSpPr/>
+          <p:nvPr/>
+        </p:nvSpPr>
+        <p:spPr>
+          <a:xfrm>
+            <a:off x="8616010" y="91440"/>
+            <a:ext cx="3027045" cy="274320"/>
+          </a:xfrm>
+          <a:prstGeom prst="rect">
+            <a:avLst/>
+          </a:prstGeom>
+          <a:solidFill>
+            <a:srgbClr val="E0F2FE"/>
+          </a:solidFill>
+          <a:ln w="12700">
+            <a:solidFill>
+              <a:srgbClr val="0369A1"/>
+            </a:solidFill>
+            <a:prstDash val="solid"/>
+          </a:ln>
+        </p:spPr>
+      </p:sp>
+      <p:sp>
+        <p:nvSpPr>
+          <p:cNvPr id="18" name="Shape 16"/>
+          <p:cNvSpPr/>
+          <p:nvPr/>
+        </p:nvSpPr>
+        <p:spPr>
+          <a:xfrm>
+            <a:off x="8616010" y="91440"/>
+            <a:ext cx="73152" cy="274320"/>
+          </a:xfrm>
+          <a:prstGeom prst="rect">
+            <a:avLst/>
+          </a:prstGeom>
+          <a:solidFill>
+            <a:srgbClr val="0369A1"/>
+          </a:solidFill>
+          <a:ln w="12700">
+            <a:solidFill>
+              <a:srgbClr val="0369A1"/>
+            </a:solidFill>
+            <a:prstDash val="solid"/>
+          </a:ln>
+        </p:spPr>
+      </p:sp>
+      <p:pic>
+        <p:nvPicPr>
+          <p:cNvPr id="19" name="Image 0" descr="preencoded.png">    </p:cNvPr>
+          <p:cNvPicPr>
+            <a:picLocks noChangeAspect="1"/>
+          </p:cNvPicPr>
+          <p:nvPr/>
+        </p:nvPicPr>
+        <p:blipFill>
+          <a:blip r:embed="rId1"/>
+          <a:stretch>
+            <a:fillRect/>
+          </a:stretch>
+        </p:blipFill>
+        <p:spPr>
+          <a:xfrm>
+            <a:off x="8744026" y="128016"/>
+            <a:ext cx="201168" cy="201168"/>
+          </a:xfrm>
+          <a:prstGeom prst="rect">
+            <a:avLst/>
+          </a:prstGeom>
+        </p:spPr>
+      </p:pic>
+      <p:sp>
+        <p:nvSpPr>
+          <p:cNvPr id="20" name="Text 17"/>
+          <p:cNvSpPr txBox="1"/>
+          <p:nvPr/>
+        </p:nvSpPr>
+        <p:spPr>
+          <a:xfrm>
+            <a:off x="9000058" y="91440"/>
+            <a:ext cx="2606421" cy="274320"/>
+          </a:xfrm>
+          <a:prstGeom prst="rect">
+            <a:avLst/>
+          </a:prstGeom>
+          <a:noFill/>
+          <a:ln/>
+        </p:spPr>
+        <p:txBody>
+          <a:bodyPr wrap="square" lIns="0" tIns="0" rIns="0" bIns="0" rtlCol="0" anchor="ctr"/>
+          <a:lstStyle/>
+          <a:p>
+            <a:pPr indent="0" marL="0">
+              <a:buNone/>
+            </a:pPr>
+            <a:r>
+              <a:rPr lang="en-US" sz="1100" b="1" dirty="0">
+                <a:solidFill>
+                  <a:srgbClr val="075985"/>
+                </a:solidFill>
+                <a:latin typeface="Calibri" pitchFamily="34" charset="0"/>
+                <a:ea typeface="Calibri" pitchFamily="34" charset="-122"/>
+                <a:cs typeface="Calibri" pitchFamily="34" charset="-120"/>
+              </a:rPr>
+              <a:t>UNDERSTAND NOW</a:t>
+            </a:r>
+            <a:pPr indent="0" marL="0">
+              <a:buNone/>
+            </a:pPr>
+            <a:r>
+              <a:rPr lang="en-US" sz="1100" dirty="0">
+                <a:solidFill>
+                  <a:srgbClr val="075985"/>
+                </a:solidFill>
+                <a:latin typeface="Calibri" pitchFamily="34" charset="0"/>
+                <a:ea typeface="Calibri" pitchFamily="34" charset="-122"/>
+                <a:cs typeface="Calibri" pitchFamily="34" charset="-120"/>
+              </a:rPr>
+              <a:t> · the frame buffer</a:t>
+            </a:r>
+            <a:endParaRPr lang="en-US" sz="1100" dirty="0"/>
+          </a:p>
+        </p:txBody>
+      </p:sp>
+      <p:sp>
+        <p:nvSpPr>
           <p:cNvPr id="25" name="Slide Number Placeholder 0"/>
           <p:cNvSpPr>
             <a:spLocks noGrp="1"/>
@@ -15361,6 +16819,133 @@
       </p:sp>
       <p:sp>
         <p:nvSpPr>
+          <p:cNvPr id="17" name="Shape 15"/>
+          <p:cNvSpPr/>
+          <p:nvPr/>
+        </p:nvSpPr>
+        <p:spPr>
+          <a:xfrm>
+            <a:off x="8616010" y="91440"/>
+            <a:ext cx="3027045" cy="274320"/>
+          </a:xfrm>
+          <a:prstGeom prst="rect">
+            <a:avLst/>
+          </a:prstGeom>
+          <a:solidFill>
+            <a:srgbClr val="E0F2FE"/>
+          </a:solidFill>
+          <a:ln w="12700">
+            <a:solidFill>
+              <a:srgbClr val="0369A1"/>
+            </a:solidFill>
+            <a:prstDash val="solid"/>
+          </a:ln>
+        </p:spPr>
+      </p:sp>
+      <p:sp>
+        <p:nvSpPr>
+          <p:cNvPr id="18" name="Shape 16"/>
+          <p:cNvSpPr/>
+          <p:nvPr/>
+        </p:nvSpPr>
+        <p:spPr>
+          <a:xfrm>
+            <a:off x="8616010" y="91440"/>
+            <a:ext cx="73152" cy="274320"/>
+          </a:xfrm>
+          <a:prstGeom prst="rect">
+            <a:avLst/>
+          </a:prstGeom>
+          <a:solidFill>
+            <a:srgbClr val="0369A1"/>
+          </a:solidFill>
+          <a:ln w="12700">
+            <a:solidFill>
+              <a:srgbClr val="0369A1"/>
+            </a:solidFill>
+            <a:prstDash val="solid"/>
+          </a:ln>
+        </p:spPr>
+      </p:sp>
+      <p:pic>
+        <p:nvPicPr>
+          <p:cNvPr id="19" name="Image 0" descr="preencoded.png">    </p:cNvPr>
+          <p:cNvPicPr>
+            <a:picLocks noChangeAspect="1"/>
+          </p:cNvPicPr>
+          <p:nvPr/>
+        </p:nvPicPr>
+        <p:blipFill>
+          <a:blip r:embed="rId1"/>
+          <a:stretch>
+            <a:fillRect/>
+          </a:stretch>
+        </p:blipFill>
+        <p:spPr>
+          <a:xfrm>
+            <a:off x="8744026" y="128016"/>
+            <a:ext cx="201168" cy="201168"/>
+          </a:xfrm>
+          <a:prstGeom prst="rect">
+            <a:avLst/>
+          </a:prstGeom>
+        </p:spPr>
+      </p:pic>
+      <p:sp>
+        <p:nvSpPr>
+          <p:cNvPr id="20" name="Text 17"/>
+          <p:cNvSpPr txBox="1"/>
+          <p:nvPr/>
+        </p:nvSpPr>
+        <p:spPr>
+          <a:xfrm>
+            <a:off x="9000058" y="91440"/>
+            <a:ext cx="2606421" cy="274320"/>
+          </a:xfrm>
+          <a:prstGeom prst="rect">
+            <a:avLst/>
+          </a:prstGeom>
+          <a:noFill/>
+          <a:ln/>
+        </p:spPr>
+        <p:txBody>
+          <a:bodyPr wrap="square" lIns="0" tIns="0" rIns="0" bIns="0" rtlCol="0" anchor="ctr"/>
+          <a:lstStyle/>
+          <a:p>
+            <a:pPr indent="0" marL="0">
+              <a:buNone/>
+            </a:pPr>
+            <a:r>
+              <a:rPr lang="en-US" sz="1100" b="1" dirty="0">
+                <a:solidFill>
+                  <a:srgbClr val="075985"/>
+                </a:solidFill>
+                <a:latin typeface="Calibri" pitchFamily="34" charset="0"/>
+                <a:ea typeface="Calibri" pitchFamily="34" charset="-122"/>
+                <a:cs typeface="Calibri" pitchFamily="34" charset="-120"/>
+              </a:rPr>
+              <a:t>UNDERSTAND NOW</a:t>
+            </a:r>
+            <a:pPr indent="0" marL="0">
+              <a:buNone/>
+            </a:pPr>
+            <a:r>
+              <a:rPr lang="en-US" sz="1100" dirty="0">
+                <a:solidFill>
+                  <a:srgbClr val="075985"/>
+                </a:solidFill>
+                <a:latin typeface="Calibri" pitchFamily="34" charset="0"/>
+                <a:ea typeface="Calibri" pitchFamily="34" charset="-122"/>
+                <a:cs typeface="Calibri" pitchFamily="34" charset="-120"/>
+              </a:rPr>
+              <a:t> · the frame buffer</a:t>
+            </a:r>
+            <a:endParaRPr lang="en-US" sz="1100" dirty="0"/>
+          </a:p>
+        </p:txBody>
+      </p:sp>
+      <p:sp>
+        <p:nvSpPr>
           <p:cNvPr id="25" name="Slide Number Placeholder 0"/>
           <p:cNvSpPr>
             <a:spLocks noGrp="1"/>
@@ -16200,6 +17785,133 @@
       </p:sp>
       <p:sp>
         <p:nvSpPr>
+          <p:cNvPr id="14" name="Shape 12"/>
+          <p:cNvSpPr/>
+          <p:nvPr/>
+        </p:nvSpPr>
+        <p:spPr>
+          <a:xfrm>
+            <a:off x="8616010" y="91440"/>
+            <a:ext cx="3027045" cy="274320"/>
+          </a:xfrm>
+          <a:prstGeom prst="rect">
+            <a:avLst/>
+          </a:prstGeom>
+          <a:solidFill>
+            <a:srgbClr val="E0F2FE"/>
+          </a:solidFill>
+          <a:ln w="12700">
+            <a:solidFill>
+              <a:srgbClr val="0369A1"/>
+            </a:solidFill>
+            <a:prstDash val="solid"/>
+          </a:ln>
+        </p:spPr>
+      </p:sp>
+      <p:sp>
+        <p:nvSpPr>
+          <p:cNvPr id="15" name="Shape 13"/>
+          <p:cNvSpPr/>
+          <p:nvPr/>
+        </p:nvSpPr>
+        <p:spPr>
+          <a:xfrm>
+            <a:off x="8616010" y="91440"/>
+            <a:ext cx="73152" cy="274320"/>
+          </a:xfrm>
+          <a:prstGeom prst="rect">
+            <a:avLst/>
+          </a:prstGeom>
+          <a:solidFill>
+            <a:srgbClr val="0369A1"/>
+          </a:solidFill>
+          <a:ln w="12700">
+            <a:solidFill>
+              <a:srgbClr val="0369A1"/>
+            </a:solidFill>
+            <a:prstDash val="solid"/>
+          </a:ln>
+        </p:spPr>
+      </p:sp>
+      <p:pic>
+        <p:nvPicPr>
+          <p:cNvPr id="16" name="Image 0" descr="preencoded.png">    </p:cNvPr>
+          <p:cNvPicPr>
+            <a:picLocks noChangeAspect="1"/>
+          </p:cNvPicPr>
+          <p:nvPr/>
+        </p:nvPicPr>
+        <p:blipFill>
+          <a:blip r:embed="rId1"/>
+          <a:stretch>
+            <a:fillRect/>
+          </a:stretch>
+        </p:blipFill>
+        <p:spPr>
+          <a:xfrm>
+            <a:off x="8744026" y="128016"/>
+            <a:ext cx="201168" cy="201168"/>
+          </a:xfrm>
+          <a:prstGeom prst="rect">
+            <a:avLst/>
+          </a:prstGeom>
+        </p:spPr>
+      </p:pic>
+      <p:sp>
+        <p:nvSpPr>
+          <p:cNvPr id="17" name="Text 14"/>
+          <p:cNvSpPr txBox="1"/>
+          <p:nvPr/>
+        </p:nvSpPr>
+        <p:spPr>
+          <a:xfrm>
+            <a:off x="9000058" y="91440"/>
+            <a:ext cx="2606421" cy="274320"/>
+          </a:xfrm>
+          <a:prstGeom prst="rect">
+            <a:avLst/>
+          </a:prstGeom>
+          <a:noFill/>
+          <a:ln/>
+        </p:spPr>
+        <p:txBody>
+          <a:bodyPr wrap="square" lIns="0" tIns="0" rIns="0" bIns="0" rtlCol="0" anchor="ctr"/>
+          <a:lstStyle/>
+          <a:p>
+            <a:pPr indent="0" marL="0">
+              <a:buNone/>
+            </a:pPr>
+            <a:r>
+              <a:rPr lang="en-US" sz="1100" b="1" dirty="0">
+                <a:solidFill>
+                  <a:srgbClr val="075985"/>
+                </a:solidFill>
+                <a:latin typeface="Calibri" pitchFamily="34" charset="0"/>
+                <a:ea typeface="Calibri" pitchFamily="34" charset="-122"/>
+                <a:cs typeface="Calibri" pitchFamily="34" charset="-120"/>
+              </a:rPr>
+              <a:t>UNDERSTAND NOW</a:t>
+            </a:r>
+            <a:pPr indent="0" marL="0">
+              <a:buNone/>
+            </a:pPr>
+            <a:r>
+              <a:rPr lang="en-US" sz="1100" dirty="0">
+                <a:solidFill>
+                  <a:srgbClr val="075985"/>
+                </a:solidFill>
+                <a:latin typeface="Calibri" pitchFamily="34" charset="0"/>
+                <a:ea typeface="Calibri" pitchFamily="34" charset="-122"/>
+                <a:cs typeface="Calibri" pitchFamily="34" charset="-120"/>
+              </a:rPr>
+              <a:t> · the frame buffer</a:t>
+            </a:r>
+            <a:endParaRPr lang="en-US" sz="1100" dirty="0"/>
+          </a:p>
+        </p:txBody>
+      </p:sp>
+      <p:sp>
+        <p:nvSpPr>
           <p:cNvPr id="25" name="Slide Number Placeholder 0"/>
           <p:cNvSpPr>
             <a:spLocks noGrp="1"/>
@@ -16824,6 +18536,133 @@
       </p:sp>
       <p:sp>
         <p:nvSpPr>
+          <p:cNvPr id="11" name="Shape 9"/>
+          <p:cNvSpPr/>
+          <p:nvPr/>
+        </p:nvSpPr>
+        <p:spPr>
+          <a:xfrm>
+            <a:off x="8616010" y="91440"/>
+            <a:ext cx="3027045" cy="274320"/>
+          </a:xfrm>
+          <a:prstGeom prst="rect">
+            <a:avLst/>
+          </a:prstGeom>
+          <a:solidFill>
+            <a:srgbClr val="E0F2FE"/>
+          </a:solidFill>
+          <a:ln w="12700">
+            <a:solidFill>
+              <a:srgbClr val="0369A1"/>
+            </a:solidFill>
+            <a:prstDash val="solid"/>
+          </a:ln>
+        </p:spPr>
+      </p:sp>
+      <p:sp>
+        <p:nvSpPr>
+          <p:cNvPr id="12" name="Shape 10"/>
+          <p:cNvSpPr/>
+          <p:nvPr/>
+        </p:nvSpPr>
+        <p:spPr>
+          <a:xfrm>
+            <a:off x="8616010" y="91440"/>
+            <a:ext cx="73152" cy="274320"/>
+          </a:xfrm>
+          <a:prstGeom prst="rect">
+            <a:avLst/>
+          </a:prstGeom>
+          <a:solidFill>
+            <a:srgbClr val="0369A1"/>
+          </a:solidFill>
+          <a:ln w="12700">
+            <a:solidFill>
+              <a:srgbClr val="0369A1"/>
+            </a:solidFill>
+            <a:prstDash val="solid"/>
+          </a:ln>
+        </p:spPr>
+      </p:sp>
+      <p:pic>
+        <p:nvPicPr>
+          <p:cNvPr id="13" name="Image 0" descr="preencoded.png">    </p:cNvPr>
+          <p:cNvPicPr>
+            <a:picLocks noChangeAspect="1"/>
+          </p:cNvPicPr>
+          <p:nvPr/>
+        </p:nvPicPr>
+        <p:blipFill>
+          <a:blip r:embed="rId1"/>
+          <a:stretch>
+            <a:fillRect/>
+          </a:stretch>
+        </p:blipFill>
+        <p:spPr>
+          <a:xfrm>
+            <a:off x="8744026" y="128016"/>
+            <a:ext cx="201168" cy="201168"/>
+          </a:xfrm>
+          <a:prstGeom prst="rect">
+            <a:avLst/>
+          </a:prstGeom>
+        </p:spPr>
+      </p:pic>
+      <p:sp>
+        <p:nvSpPr>
+          <p:cNvPr id="14" name="Text 11"/>
+          <p:cNvSpPr txBox="1"/>
+          <p:nvPr/>
+        </p:nvSpPr>
+        <p:spPr>
+          <a:xfrm>
+            <a:off x="9000058" y="91440"/>
+            <a:ext cx="2606421" cy="274320"/>
+          </a:xfrm>
+          <a:prstGeom prst="rect">
+            <a:avLst/>
+          </a:prstGeom>
+          <a:noFill/>
+          <a:ln/>
+        </p:spPr>
+        <p:txBody>
+          <a:bodyPr wrap="square" lIns="0" tIns="0" rIns="0" bIns="0" rtlCol="0" anchor="ctr"/>
+          <a:lstStyle/>
+          <a:p>
+            <a:pPr indent="0" marL="0">
+              <a:buNone/>
+            </a:pPr>
+            <a:r>
+              <a:rPr lang="en-US" sz="1100" b="1" dirty="0">
+                <a:solidFill>
+                  <a:srgbClr val="075985"/>
+                </a:solidFill>
+                <a:latin typeface="Calibri" pitchFamily="34" charset="0"/>
+                <a:ea typeface="Calibri" pitchFamily="34" charset="-122"/>
+                <a:cs typeface="Calibri" pitchFamily="34" charset="-120"/>
+              </a:rPr>
+              <a:t>UNDERSTAND NOW</a:t>
+            </a:r>
+            <a:pPr indent="0" marL="0">
+              <a:buNone/>
+            </a:pPr>
+            <a:r>
+              <a:rPr lang="en-US" sz="1100" dirty="0">
+                <a:solidFill>
+                  <a:srgbClr val="075985"/>
+                </a:solidFill>
+                <a:latin typeface="Calibri" pitchFamily="34" charset="0"/>
+                <a:ea typeface="Calibri" pitchFamily="34" charset="-122"/>
+                <a:cs typeface="Calibri" pitchFamily="34" charset="-120"/>
+              </a:rPr>
+              <a:t> · the frame buffer</a:t>
+            </a:r>
+            <a:endParaRPr lang="en-US" sz="1100" dirty="0"/>
+          </a:p>
+        </p:txBody>
+      </p:sp>
+      <p:sp>
+        <p:nvSpPr>
           <p:cNvPr id="25" name="Slide Number Placeholder 0"/>
           <p:cNvSpPr>
             <a:spLocks noGrp="1"/>
@@ -17485,6 +19324,133 @@
       </p:sp>
       <p:sp>
         <p:nvSpPr>
+          <p:cNvPr id="11" name="Shape 9"/>
+          <p:cNvSpPr/>
+          <p:nvPr/>
+        </p:nvSpPr>
+        <p:spPr>
+          <a:xfrm>
+            <a:off x="8616010" y="91440"/>
+            <a:ext cx="3027045" cy="274320"/>
+          </a:xfrm>
+          <a:prstGeom prst="rect">
+            <a:avLst/>
+          </a:prstGeom>
+          <a:solidFill>
+            <a:srgbClr val="E0F2FE"/>
+          </a:solidFill>
+          <a:ln w="12700">
+            <a:solidFill>
+              <a:srgbClr val="0369A1"/>
+            </a:solidFill>
+            <a:prstDash val="solid"/>
+          </a:ln>
+        </p:spPr>
+      </p:sp>
+      <p:sp>
+        <p:nvSpPr>
+          <p:cNvPr id="12" name="Shape 10"/>
+          <p:cNvSpPr/>
+          <p:nvPr/>
+        </p:nvSpPr>
+        <p:spPr>
+          <a:xfrm>
+            <a:off x="8616010" y="91440"/>
+            <a:ext cx="73152" cy="274320"/>
+          </a:xfrm>
+          <a:prstGeom prst="rect">
+            <a:avLst/>
+          </a:prstGeom>
+          <a:solidFill>
+            <a:srgbClr val="0369A1"/>
+          </a:solidFill>
+          <a:ln w="12700">
+            <a:solidFill>
+              <a:srgbClr val="0369A1"/>
+            </a:solidFill>
+            <a:prstDash val="solid"/>
+          </a:ln>
+        </p:spPr>
+      </p:sp>
+      <p:pic>
+        <p:nvPicPr>
+          <p:cNvPr id="13" name="Image 0" descr="preencoded.png">    </p:cNvPr>
+          <p:cNvPicPr>
+            <a:picLocks noChangeAspect="1"/>
+          </p:cNvPicPr>
+          <p:nvPr/>
+        </p:nvPicPr>
+        <p:blipFill>
+          <a:blip r:embed="rId1"/>
+          <a:stretch>
+            <a:fillRect/>
+          </a:stretch>
+        </p:blipFill>
+        <p:spPr>
+          <a:xfrm>
+            <a:off x="8744026" y="128016"/>
+            <a:ext cx="201168" cy="201168"/>
+          </a:xfrm>
+          <a:prstGeom prst="rect">
+            <a:avLst/>
+          </a:prstGeom>
+        </p:spPr>
+      </p:pic>
+      <p:sp>
+        <p:nvSpPr>
+          <p:cNvPr id="14" name="Text 11"/>
+          <p:cNvSpPr txBox="1"/>
+          <p:nvPr/>
+        </p:nvSpPr>
+        <p:spPr>
+          <a:xfrm>
+            <a:off x="9000058" y="91440"/>
+            <a:ext cx="2606421" cy="274320"/>
+          </a:xfrm>
+          <a:prstGeom prst="rect">
+            <a:avLst/>
+          </a:prstGeom>
+          <a:noFill/>
+          <a:ln/>
+        </p:spPr>
+        <p:txBody>
+          <a:bodyPr wrap="square" lIns="0" tIns="0" rIns="0" bIns="0" rtlCol="0" anchor="ctr"/>
+          <a:lstStyle/>
+          <a:p>
+            <a:pPr indent="0" marL="0">
+              <a:buNone/>
+            </a:pPr>
+            <a:r>
+              <a:rPr lang="en-US" sz="1100" b="1" dirty="0">
+                <a:solidFill>
+                  <a:srgbClr val="075985"/>
+                </a:solidFill>
+                <a:latin typeface="Calibri" pitchFamily="34" charset="0"/>
+                <a:ea typeface="Calibri" pitchFamily="34" charset="-122"/>
+                <a:cs typeface="Calibri" pitchFamily="34" charset="-120"/>
+              </a:rPr>
+              <a:t>UNDERSTAND NOW</a:t>
+            </a:r>
+            <a:pPr indent="0" marL="0">
+              <a:buNone/>
+            </a:pPr>
+            <a:r>
+              <a:rPr lang="en-US" sz="1100" dirty="0">
+                <a:solidFill>
+                  <a:srgbClr val="075985"/>
+                </a:solidFill>
+                <a:latin typeface="Calibri" pitchFamily="34" charset="0"/>
+                <a:ea typeface="Calibri" pitchFamily="34" charset="-122"/>
+                <a:cs typeface="Calibri" pitchFamily="34" charset="-120"/>
+              </a:rPr>
+              <a:t> · the frame buffer</a:t>
+            </a:r>
+            <a:endParaRPr lang="en-US" sz="1100" dirty="0"/>
+          </a:p>
+        </p:txBody>
+      </p:sp>
+      <p:sp>
+        <p:nvSpPr>
           <p:cNvPr id="25" name="Slide Number Placeholder 0"/>
           <p:cNvSpPr>
             <a:spLocks noGrp="1"/>
@@ -18078,6 +20044,133 @@
       </p:sp>
       <p:sp>
         <p:nvSpPr>
+          <p:cNvPr id="11" name="Shape 9"/>
+          <p:cNvSpPr/>
+          <p:nvPr/>
+        </p:nvSpPr>
+        <p:spPr>
+          <a:xfrm>
+            <a:off x="8616010" y="91440"/>
+            <a:ext cx="3027045" cy="274320"/>
+          </a:xfrm>
+          <a:prstGeom prst="rect">
+            <a:avLst/>
+          </a:prstGeom>
+          <a:solidFill>
+            <a:srgbClr val="E0F2FE"/>
+          </a:solidFill>
+          <a:ln w="12700">
+            <a:solidFill>
+              <a:srgbClr val="0369A1"/>
+            </a:solidFill>
+            <a:prstDash val="solid"/>
+          </a:ln>
+        </p:spPr>
+      </p:sp>
+      <p:sp>
+        <p:nvSpPr>
+          <p:cNvPr id="12" name="Shape 10"/>
+          <p:cNvSpPr/>
+          <p:nvPr/>
+        </p:nvSpPr>
+        <p:spPr>
+          <a:xfrm>
+            <a:off x="8616010" y="91440"/>
+            <a:ext cx="73152" cy="274320"/>
+          </a:xfrm>
+          <a:prstGeom prst="rect">
+            <a:avLst/>
+          </a:prstGeom>
+          <a:solidFill>
+            <a:srgbClr val="0369A1"/>
+          </a:solidFill>
+          <a:ln w="12700">
+            <a:solidFill>
+              <a:srgbClr val="0369A1"/>
+            </a:solidFill>
+            <a:prstDash val="solid"/>
+          </a:ln>
+        </p:spPr>
+      </p:sp>
+      <p:pic>
+        <p:nvPicPr>
+          <p:cNvPr id="13" name="Image 0" descr="preencoded.png">    </p:cNvPr>
+          <p:cNvPicPr>
+            <a:picLocks noChangeAspect="1"/>
+          </p:cNvPicPr>
+          <p:nvPr/>
+        </p:nvPicPr>
+        <p:blipFill>
+          <a:blip r:embed="rId1"/>
+          <a:stretch>
+            <a:fillRect/>
+          </a:stretch>
+        </p:blipFill>
+        <p:spPr>
+          <a:xfrm>
+            <a:off x="8744026" y="128016"/>
+            <a:ext cx="201168" cy="201168"/>
+          </a:xfrm>
+          <a:prstGeom prst="rect">
+            <a:avLst/>
+          </a:prstGeom>
+        </p:spPr>
+      </p:pic>
+      <p:sp>
+        <p:nvSpPr>
+          <p:cNvPr id="14" name="Text 11"/>
+          <p:cNvSpPr txBox="1"/>
+          <p:nvPr/>
+        </p:nvSpPr>
+        <p:spPr>
+          <a:xfrm>
+            <a:off x="9000058" y="91440"/>
+            <a:ext cx="2606421" cy="274320"/>
+          </a:xfrm>
+          <a:prstGeom prst="rect">
+            <a:avLst/>
+          </a:prstGeom>
+          <a:noFill/>
+          <a:ln/>
+        </p:spPr>
+        <p:txBody>
+          <a:bodyPr wrap="square" lIns="0" tIns="0" rIns="0" bIns="0" rtlCol="0" anchor="ctr"/>
+          <a:lstStyle/>
+          <a:p>
+            <a:pPr indent="0" marL="0">
+              <a:buNone/>
+            </a:pPr>
+            <a:r>
+              <a:rPr lang="en-US" sz="1100" b="1" dirty="0">
+                <a:solidFill>
+                  <a:srgbClr val="075985"/>
+                </a:solidFill>
+                <a:latin typeface="Calibri" pitchFamily="34" charset="0"/>
+                <a:ea typeface="Calibri" pitchFamily="34" charset="-122"/>
+                <a:cs typeface="Calibri" pitchFamily="34" charset="-120"/>
+              </a:rPr>
+              <a:t>UNDERSTAND NOW</a:t>
+            </a:r>
+            <a:pPr indent="0" marL="0">
+              <a:buNone/>
+            </a:pPr>
+            <a:r>
+              <a:rPr lang="en-US" sz="1100" dirty="0">
+                <a:solidFill>
+                  <a:srgbClr val="075985"/>
+                </a:solidFill>
+                <a:latin typeface="Calibri" pitchFamily="34" charset="0"/>
+                <a:ea typeface="Calibri" pitchFamily="34" charset="-122"/>
+                <a:cs typeface="Calibri" pitchFamily="34" charset="-120"/>
+              </a:rPr>
+              <a:t> · the frame buffer</a:t>
+            </a:r>
+            <a:endParaRPr lang="en-US" sz="1100" dirty="0"/>
+          </a:p>
+        </p:txBody>
+      </p:sp>
+      <p:sp>
+        <p:nvSpPr>
           <p:cNvPr id="25" name="Slide Number Placeholder 0"/>
           <p:cNvSpPr>
             <a:spLocks noGrp="1"/>
@@ -19063,6 +21156,133 @@
       </p:sp>
       <p:sp>
         <p:nvSpPr>
+          <p:cNvPr id="8" name="Shape 6"/>
+          <p:cNvSpPr/>
+          <p:nvPr/>
+        </p:nvSpPr>
+        <p:spPr>
+          <a:xfrm>
+            <a:off x="8287715" y="91440"/>
+            <a:ext cx="3355340" cy="274320"/>
+          </a:xfrm>
+          <a:prstGeom prst="rect">
+            <a:avLst/>
+          </a:prstGeom>
+          <a:solidFill>
+            <a:srgbClr val="E0F2FE"/>
+          </a:solidFill>
+          <a:ln w="12700">
+            <a:solidFill>
+              <a:srgbClr val="0369A1"/>
+            </a:solidFill>
+            <a:prstDash val="solid"/>
+          </a:ln>
+        </p:spPr>
+      </p:sp>
+      <p:sp>
+        <p:nvSpPr>
+          <p:cNvPr id="9" name="Shape 7"/>
+          <p:cNvSpPr/>
+          <p:nvPr/>
+        </p:nvSpPr>
+        <p:spPr>
+          <a:xfrm>
+            <a:off x="8287715" y="91440"/>
+            <a:ext cx="73152" cy="274320"/>
+          </a:xfrm>
+          <a:prstGeom prst="rect">
+            <a:avLst/>
+          </a:prstGeom>
+          <a:solidFill>
+            <a:srgbClr val="0369A1"/>
+          </a:solidFill>
+          <a:ln w="12700">
+            <a:solidFill>
+              <a:srgbClr val="0369A1"/>
+            </a:solidFill>
+            <a:prstDash val="solid"/>
+          </a:ln>
+        </p:spPr>
+      </p:sp>
+      <p:pic>
+        <p:nvPicPr>
+          <p:cNvPr id="10" name="Image 0" descr="preencoded.png">    </p:cNvPr>
+          <p:cNvPicPr>
+            <a:picLocks noChangeAspect="1"/>
+          </p:cNvPicPr>
+          <p:nvPr/>
+        </p:nvPicPr>
+        <p:blipFill>
+          <a:blip r:embed="rId1"/>
+          <a:stretch>
+            <a:fillRect/>
+          </a:stretch>
+        </p:blipFill>
+        <p:spPr>
+          <a:xfrm>
+            <a:off x="8415731" y="128016"/>
+            <a:ext cx="201168" cy="201168"/>
+          </a:xfrm>
+          <a:prstGeom prst="rect">
+            <a:avLst/>
+          </a:prstGeom>
+        </p:spPr>
+      </p:pic>
+      <p:sp>
+        <p:nvSpPr>
+          <p:cNvPr id="11" name="Text 8"/>
+          <p:cNvSpPr txBox="1"/>
+          <p:nvPr/>
+        </p:nvSpPr>
+        <p:spPr>
+          <a:xfrm>
+            <a:off x="8671763" y="91440"/>
+            <a:ext cx="2934716" cy="274320"/>
+          </a:xfrm>
+          <a:prstGeom prst="rect">
+            <a:avLst/>
+          </a:prstGeom>
+          <a:noFill/>
+          <a:ln/>
+        </p:spPr>
+        <p:txBody>
+          <a:bodyPr wrap="square" lIns="0" tIns="0" rIns="0" bIns="0" rtlCol="0" anchor="ctr"/>
+          <a:lstStyle/>
+          <a:p>
+            <a:pPr indent="0" marL="0">
+              <a:buNone/>
+            </a:pPr>
+            <a:r>
+              <a:rPr lang="en-US" sz="1100" b="1" dirty="0">
+                <a:solidFill>
+                  <a:srgbClr val="075985"/>
+                </a:solidFill>
+                <a:latin typeface="Calibri" pitchFamily="34" charset="0"/>
+                <a:ea typeface="Calibri" pitchFamily="34" charset="-122"/>
+                <a:cs typeface="Calibri" pitchFamily="34" charset="-120"/>
+              </a:rPr>
+              <a:t>UNDERSTAND NOW</a:t>
+            </a:r>
+            <a:pPr indent="0" marL="0">
+              <a:buNone/>
+            </a:pPr>
+            <a:r>
+              <a:rPr lang="en-US" sz="1100" dirty="0">
+                <a:solidFill>
+                  <a:srgbClr val="075985"/>
+                </a:solidFill>
+                <a:latin typeface="Calibri" pitchFamily="34" charset="0"/>
+                <a:ea typeface="Calibri" pitchFamily="34" charset="-122"/>
+                <a:cs typeface="Calibri" pitchFamily="34" charset="-120"/>
+              </a:rPr>
+              <a:t> · finite-state machines</a:t>
+            </a:r>
+            <a:endParaRPr lang="en-US" sz="1100" dirty="0"/>
+          </a:p>
+        </p:txBody>
+      </p:sp>
+      <p:sp>
+        <p:nvSpPr>
           <p:cNvPr id="25" name="Slide Number Placeholder 0"/>
           <p:cNvSpPr>
             <a:spLocks noGrp="1"/>
@@ -19947,6 +22167,133 @@
       </p:sp>
       <p:sp>
         <p:nvSpPr>
+          <p:cNvPr id="11" name="Shape 9"/>
+          <p:cNvSpPr/>
+          <p:nvPr/>
+        </p:nvSpPr>
+        <p:spPr>
+          <a:xfrm>
+            <a:off x="8287715" y="91440"/>
+            <a:ext cx="3355340" cy="274320"/>
+          </a:xfrm>
+          <a:prstGeom prst="rect">
+            <a:avLst/>
+          </a:prstGeom>
+          <a:solidFill>
+            <a:srgbClr val="E0F2FE"/>
+          </a:solidFill>
+          <a:ln w="12700">
+            <a:solidFill>
+              <a:srgbClr val="0369A1"/>
+            </a:solidFill>
+            <a:prstDash val="solid"/>
+          </a:ln>
+        </p:spPr>
+      </p:sp>
+      <p:sp>
+        <p:nvSpPr>
+          <p:cNvPr id="12" name="Shape 10"/>
+          <p:cNvSpPr/>
+          <p:nvPr/>
+        </p:nvSpPr>
+        <p:spPr>
+          <a:xfrm>
+            <a:off x="8287715" y="91440"/>
+            <a:ext cx="73152" cy="274320"/>
+          </a:xfrm>
+          <a:prstGeom prst="rect">
+            <a:avLst/>
+          </a:prstGeom>
+          <a:solidFill>
+            <a:srgbClr val="0369A1"/>
+          </a:solidFill>
+          <a:ln w="12700">
+            <a:solidFill>
+              <a:srgbClr val="0369A1"/>
+            </a:solidFill>
+            <a:prstDash val="solid"/>
+          </a:ln>
+        </p:spPr>
+      </p:sp>
+      <p:pic>
+        <p:nvPicPr>
+          <p:cNvPr id="13" name="Image 0" descr="preencoded.png">    </p:cNvPr>
+          <p:cNvPicPr>
+            <a:picLocks noChangeAspect="1"/>
+          </p:cNvPicPr>
+          <p:nvPr/>
+        </p:nvPicPr>
+        <p:blipFill>
+          <a:blip r:embed="rId1"/>
+          <a:stretch>
+            <a:fillRect/>
+          </a:stretch>
+        </p:blipFill>
+        <p:spPr>
+          <a:xfrm>
+            <a:off x="8415731" y="128016"/>
+            <a:ext cx="201168" cy="201168"/>
+          </a:xfrm>
+          <a:prstGeom prst="rect">
+            <a:avLst/>
+          </a:prstGeom>
+        </p:spPr>
+      </p:pic>
+      <p:sp>
+        <p:nvSpPr>
+          <p:cNvPr id="14" name="Text 11"/>
+          <p:cNvSpPr txBox="1"/>
+          <p:nvPr/>
+        </p:nvSpPr>
+        <p:spPr>
+          <a:xfrm>
+            <a:off x="8671763" y="91440"/>
+            <a:ext cx="2934716" cy="274320"/>
+          </a:xfrm>
+          <a:prstGeom prst="rect">
+            <a:avLst/>
+          </a:prstGeom>
+          <a:noFill/>
+          <a:ln/>
+        </p:spPr>
+        <p:txBody>
+          <a:bodyPr wrap="square" lIns="0" tIns="0" rIns="0" bIns="0" rtlCol="0" anchor="ctr"/>
+          <a:lstStyle/>
+          <a:p>
+            <a:pPr indent="0" marL="0">
+              <a:buNone/>
+            </a:pPr>
+            <a:r>
+              <a:rPr lang="en-US" sz="1100" b="1" dirty="0">
+                <a:solidFill>
+                  <a:srgbClr val="075985"/>
+                </a:solidFill>
+                <a:latin typeface="Calibri" pitchFamily="34" charset="0"/>
+                <a:ea typeface="Calibri" pitchFamily="34" charset="-122"/>
+                <a:cs typeface="Calibri" pitchFamily="34" charset="-120"/>
+              </a:rPr>
+              <a:t>UNDERSTAND NOW</a:t>
+            </a:r>
+            <a:pPr indent="0" marL="0">
+              <a:buNone/>
+            </a:pPr>
+            <a:r>
+              <a:rPr lang="en-US" sz="1100" dirty="0">
+                <a:solidFill>
+                  <a:srgbClr val="075985"/>
+                </a:solidFill>
+                <a:latin typeface="Calibri" pitchFamily="34" charset="0"/>
+                <a:ea typeface="Calibri" pitchFamily="34" charset="-122"/>
+                <a:cs typeface="Calibri" pitchFamily="34" charset="-120"/>
+              </a:rPr>
+              <a:t> · finite-state machines</a:t>
+            </a:r>
+            <a:endParaRPr lang="en-US" sz="1100" dirty="0"/>
+          </a:p>
+        </p:txBody>
+      </p:sp>
+      <p:sp>
+        <p:nvSpPr>
           <p:cNvPr id="25" name="Slide Number Placeholder 0"/>
           <p:cNvSpPr>
             <a:spLocks noGrp="1"/>
@@ -20772,6 +23119,133 @@
       </p:sp>
       <p:sp>
         <p:nvSpPr>
+          <p:cNvPr id="11" name="Shape 9"/>
+          <p:cNvSpPr/>
+          <p:nvPr/>
+        </p:nvSpPr>
+        <p:spPr>
+          <a:xfrm>
+            <a:off x="8287715" y="91440"/>
+            <a:ext cx="3355340" cy="274320"/>
+          </a:xfrm>
+          <a:prstGeom prst="rect">
+            <a:avLst/>
+          </a:prstGeom>
+          <a:solidFill>
+            <a:srgbClr val="E0F2FE"/>
+          </a:solidFill>
+          <a:ln w="12700">
+            <a:solidFill>
+              <a:srgbClr val="0369A1"/>
+            </a:solidFill>
+            <a:prstDash val="solid"/>
+          </a:ln>
+        </p:spPr>
+      </p:sp>
+      <p:sp>
+        <p:nvSpPr>
+          <p:cNvPr id="12" name="Shape 10"/>
+          <p:cNvSpPr/>
+          <p:nvPr/>
+        </p:nvSpPr>
+        <p:spPr>
+          <a:xfrm>
+            <a:off x="8287715" y="91440"/>
+            <a:ext cx="73152" cy="274320"/>
+          </a:xfrm>
+          <a:prstGeom prst="rect">
+            <a:avLst/>
+          </a:prstGeom>
+          <a:solidFill>
+            <a:srgbClr val="0369A1"/>
+          </a:solidFill>
+          <a:ln w="12700">
+            <a:solidFill>
+              <a:srgbClr val="0369A1"/>
+            </a:solidFill>
+            <a:prstDash val="solid"/>
+          </a:ln>
+        </p:spPr>
+      </p:sp>
+      <p:pic>
+        <p:nvPicPr>
+          <p:cNvPr id="13" name="Image 0" descr="preencoded.png">    </p:cNvPr>
+          <p:cNvPicPr>
+            <a:picLocks noChangeAspect="1"/>
+          </p:cNvPicPr>
+          <p:nvPr/>
+        </p:nvPicPr>
+        <p:blipFill>
+          <a:blip r:embed="rId1"/>
+          <a:stretch>
+            <a:fillRect/>
+          </a:stretch>
+        </p:blipFill>
+        <p:spPr>
+          <a:xfrm>
+            <a:off x="8415731" y="128016"/>
+            <a:ext cx="201168" cy="201168"/>
+          </a:xfrm>
+          <a:prstGeom prst="rect">
+            <a:avLst/>
+          </a:prstGeom>
+        </p:spPr>
+      </p:pic>
+      <p:sp>
+        <p:nvSpPr>
+          <p:cNvPr id="14" name="Text 11"/>
+          <p:cNvSpPr txBox="1"/>
+          <p:nvPr/>
+        </p:nvSpPr>
+        <p:spPr>
+          <a:xfrm>
+            <a:off x="8671763" y="91440"/>
+            <a:ext cx="2934716" cy="274320"/>
+          </a:xfrm>
+          <a:prstGeom prst="rect">
+            <a:avLst/>
+          </a:prstGeom>
+          <a:noFill/>
+          <a:ln/>
+        </p:spPr>
+        <p:txBody>
+          <a:bodyPr wrap="square" lIns="0" tIns="0" rIns="0" bIns="0" rtlCol="0" anchor="ctr"/>
+          <a:lstStyle/>
+          <a:p>
+            <a:pPr indent="0" marL="0">
+              <a:buNone/>
+            </a:pPr>
+            <a:r>
+              <a:rPr lang="en-US" sz="1100" b="1" dirty="0">
+                <a:solidFill>
+                  <a:srgbClr val="075985"/>
+                </a:solidFill>
+                <a:latin typeface="Calibri" pitchFamily="34" charset="0"/>
+                <a:ea typeface="Calibri" pitchFamily="34" charset="-122"/>
+                <a:cs typeface="Calibri" pitchFamily="34" charset="-120"/>
+              </a:rPr>
+              <a:t>UNDERSTAND NOW</a:t>
+            </a:r>
+            <a:pPr indent="0" marL="0">
+              <a:buNone/>
+            </a:pPr>
+            <a:r>
+              <a:rPr lang="en-US" sz="1100" dirty="0">
+                <a:solidFill>
+                  <a:srgbClr val="075985"/>
+                </a:solidFill>
+                <a:latin typeface="Calibri" pitchFamily="34" charset="0"/>
+                <a:ea typeface="Calibri" pitchFamily="34" charset="-122"/>
+                <a:cs typeface="Calibri" pitchFamily="34" charset="-120"/>
+              </a:rPr>
+              <a:t> · finite-state machines</a:t>
+            </a:r>
+            <a:endParaRPr lang="en-US" sz="1100" dirty="0"/>
+          </a:p>
+        </p:txBody>
+      </p:sp>
+      <p:sp>
+        <p:nvSpPr>
           <p:cNvPr id="25" name="Slide Number Placeholder 0"/>
           <p:cNvSpPr>
             <a:spLocks noGrp="1"/>
@@ -21421,6 +23895,158 @@
       </p:sp>
       <p:sp>
         <p:nvSpPr>
+          <p:cNvPr id="5" name="Shape 3"/>
+          <p:cNvSpPr/>
+          <p:nvPr/>
+        </p:nvSpPr>
+        <p:spPr>
+          <a:xfrm>
+            <a:off x="9287967" y="91440"/>
+            <a:ext cx="2355088" cy="274320"/>
+          </a:xfrm>
+          <a:prstGeom prst="rect">
+            <a:avLst/>
+          </a:prstGeom>
+          <a:solidFill>
+            <a:srgbClr val="FEF3C7"/>
+          </a:solidFill>
+          <a:ln w="12700">
+            <a:solidFill>
+              <a:srgbClr val="B45309"/>
+            </a:solidFill>
+            <a:prstDash val="solid"/>
+          </a:ln>
+        </p:spPr>
+      </p:sp>
+      <p:sp>
+        <p:nvSpPr>
+          <p:cNvPr id="6" name="Shape 4"/>
+          <p:cNvSpPr/>
+          <p:nvPr/>
+        </p:nvSpPr>
+        <p:spPr>
+          <a:xfrm>
+            <a:off x="9287967" y="91440"/>
+            <a:ext cx="27432" cy="274320"/>
+          </a:xfrm>
+          <a:prstGeom prst="rect">
+            <a:avLst/>
+          </a:prstGeom>
+          <a:solidFill>
+            <a:srgbClr val="B45309"/>
+          </a:solidFill>
+          <a:ln w="12700">
+            <a:solidFill>
+              <a:srgbClr val="B45309"/>
+            </a:solidFill>
+            <a:prstDash val="solid"/>
+          </a:ln>
+        </p:spPr>
+      </p:sp>
+      <p:sp>
+        <p:nvSpPr>
+          <p:cNvPr id="7" name="Shape 5"/>
+          <p:cNvSpPr/>
+          <p:nvPr/>
+        </p:nvSpPr>
+        <p:spPr>
+          <a:xfrm>
+            <a:off x="9342831" y="91440"/>
+            <a:ext cx="27432" cy="274320"/>
+          </a:xfrm>
+          <a:prstGeom prst="rect">
+            <a:avLst/>
+          </a:prstGeom>
+          <a:solidFill>
+            <a:srgbClr val="B45309"/>
+          </a:solidFill>
+          <a:ln w="12700">
+            <a:solidFill>
+              <a:srgbClr val="B45309"/>
+            </a:solidFill>
+            <a:prstDash val="solid"/>
+          </a:ln>
+        </p:spPr>
+      </p:sp>
+      <p:pic>
+        <p:nvPicPr>
+          <p:cNvPr id="8" name="Image 0" descr="preencoded.png">    </p:cNvPr>
+          <p:cNvPicPr>
+            <a:picLocks noChangeAspect="1"/>
+          </p:cNvPicPr>
+          <p:nvPr/>
+        </p:nvPicPr>
+        <p:blipFill>
+          <a:blip r:embed="rId1"/>
+          <a:stretch>
+            <a:fillRect/>
+          </a:stretch>
+        </p:blipFill>
+        <p:spPr>
+          <a:xfrm>
+            <a:off x="9415983" y="128016"/>
+            <a:ext cx="201168" cy="201168"/>
+          </a:xfrm>
+          <a:prstGeom prst="rect">
+            <a:avLst/>
+          </a:prstGeom>
+        </p:spPr>
+      </p:pic>
+      <p:sp>
+        <p:nvSpPr>
+          <p:cNvPr id="9" name="Text 6"/>
+          <p:cNvSpPr txBox="1"/>
+          <p:nvPr/>
+        </p:nvSpPr>
+        <p:spPr>
+          <a:xfrm>
+            <a:off x="9672015" y="91440"/>
+            <a:ext cx="1934464" cy="274320"/>
+          </a:xfrm>
+          <a:prstGeom prst="rect">
+            <a:avLst/>
+          </a:prstGeom>
+          <a:noFill/>
+          <a:ln/>
+        </p:spPr>
+        <p:txBody>
+          <a:bodyPr wrap="square" lIns="0" tIns="0" rIns="0" bIns="0" rtlCol="0" anchor="ctr"/>
+          <a:lstStyle/>
+          <a:p>
+            <a:pPr indent="0" marL="0">
+              <a:buNone/>
+            </a:pPr>
+            <a:r>
+              <a:rPr lang="en-US" sz="1100" b="1" dirty="0">
+                <a:solidFill>
+                  <a:srgbClr val="92400E"/>
+                </a:solidFill>
+                <a:latin typeface="Calibri" pitchFamily="34" charset="0"/>
+                <a:ea typeface="Calibri" pitchFamily="34" charset="-122"/>
+                <a:cs typeface="Calibri" pitchFamily="34" charset="-120"/>
+              </a:rPr>
+              <a:t>USE NOW</a:t>
+            </a:r>
+            <a:pPr indent="0" marL="0">
+              <a:buNone/>
+            </a:pPr>
+            <a:r>
+              <a:rPr lang="en-US" sz="1100" dirty="0">
+                <a:solidFill>
+                  <a:srgbClr val="92400E"/>
+                </a:solidFill>
+                <a:latin typeface="Calibri" pitchFamily="34" charset="0"/>
+                <a:ea typeface="Calibri" pitchFamily="34" charset="-122"/>
+                <a:cs typeface="Calibri" pitchFamily="34" charset="-120"/>
+              </a:rPr>
+              <a:t> · the PRG32 tools</a:t>
+            </a:r>
+            <a:endParaRPr lang="en-US" sz="1100" dirty="0"/>
+          </a:p>
+        </p:txBody>
+      </p:sp>
+      <p:sp>
+        <p:nvSpPr>
           <p:cNvPr id="25" name="Slide Number Placeholder 0"/>
           <p:cNvSpPr>
             <a:spLocks noGrp="1"/>
@@ -28233,6 +30859,133 @@
       </p:sp>
       <p:sp>
         <p:nvSpPr>
+          <p:cNvPr id="17" name="Shape 15"/>
+          <p:cNvSpPr/>
+          <p:nvPr/>
+        </p:nvSpPr>
+        <p:spPr>
+          <a:xfrm>
+            <a:off x="8222056" y="91440"/>
+            <a:ext cx="3420999" cy="274320"/>
+          </a:xfrm>
+          <a:prstGeom prst="rect">
+            <a:avLst/>
+          </a:prstGeom>
+          <a:solidFill>
+            <a:srgbClr val="E0F2FE"/>
+          </a:solidFill>
+          <a:ln w="12700">
+            <a:solidFill>
+              <a:srgbClr val="0369A1"/>
+            </a:solidFill>
+            <a:prstDash val="solid"/>
+          </a:ln>
+        </p:spPr>
+      </p:sp>
+      <p:sp>
+        <p:nvSpPr>
+          <p:cNvPr id="18" name="Shape 16"/>
+          <p:cNvSpPr/>
+          <p:nvPr/>
+        </p:nvSpPr>
+        <p:spPr>
+          <a:xfrm>
+            <a:off x="8222056" y="91440"/>
+            <a:ext cx="73152" cy="274320"/>
+          </a:xfrm>
+          <a:prstGeom prst="rect">
+            <a:avLst/>
+          </a:prstGeom>
+          <a:solidFill>
+            <a:srgbClr val="0369A1"/>
+          </a:solidFill>
+          <a:ln w="12700">
+            <a:solidFill>
+              <a:srgbClr val="0369A1"/>
+            </a:solidFill>
+            <a:prstDash val="solid"/>
+          </a:ln>
+        </p:spPr>
+      </p:sp>
+      <p:pic>
+        <p:nvPicPr>
+          <p:cNvPr id="19" name="Image 0" descr="preencoded.png">    </p:cNvPr>
+          <p:cNvPicPr>
+            <a:picLocks noChangeAspect="1"/>
+          </p:cNvPicPr>
+          <p:nvPr/>
+        </p:nvPicPr>
+        <p:blipFill>
+          <a:blip r:embed="rId1"/>
+          <a:stretch>
+            <a:fillRect/>
+          </a:stretch>
+        </p:blipFill>
+        <p:spPr>
+          <a:xfrm>
+            <a:off x="8350072" y="128016"/>
+            <a:ext cx="201168" cy="201168"/>
+          </a:xfrm>
+          <a:prstGeom prst="rect">
+            <a:avLst/>
+          </a:prstGeom>
+        </p:spPr>
+      </p:pic>
+      <p:sp>
+        <p:nvSpPr>
+          <p:cNvPr id="20" name="Text 17"/>
+          <p:cNvSpPr txBox="1"/>
+          <p:nvPr/>
+        </p:nvSpPr>
+        <p:spPr>
+          <a:xfrm>
+            <a:off x="8606104" y="91440"/>
+            <a:ext cx="3000375" cy="274320"/>
+          </a:xfrm>
+          <a:prstGeom prst="rect">
+            <a:avLst/>
+          </a:prstGeom>
+          <a:noFill/>
+          <a:ln/>
+        </p:spPr>
+        <p:txBody>
+          <a:bodyPr wrap="square" lIns="0" tIns="0" rIns="0" bIns="0" rtlCol="0" anchor="ctr"/>
+          <a:lstStyle/>
+          <a:p>
+            <a:pPr indent="0" marL="0">
+              <a:buNone/>
+            </a:pPr>
+            <a:r>
+              <a:rPr lang="en-US" sz="1100" b="1" dirty="0">
+                <a:solidFill>
+                  <a:srgbClr val="075985"/>
+                </a:solidFill>
+                <a:latin typeface="Calibri" pitchFamily="34" charset="0"/>
+                <a:ea typeface="Calibri" pitchFamily="34" charset="-122"/>
+                <a:cs typeface="Calibri" pitchFamily="34" charset="-120"/>
+              </a:rPr>
+              <a:t>UNDERSTAND NOW</a:t>
+            </a:r>
+            <a:pPr indent="0" marL="0">
+              <a:buNone/>
+            </a:pPr>
+            <a:r>
+              <a:rPr lang="en-US" sz="1100" dirty="0">
+                <a:solidFill>
+                  <a:srgbClr val="075985"/>
+                </a:solidFill>
+                <a:latin typeface="Calibri" pitchFamily="34" charset="0"/>
+                <a:ea typeface="Calibri" pitchFamily="34" charset="-122"/>
+                <a:cs typeface="Calibri" pitchFamily="34" charset="-120"/>
+              </a:rPr>
+              <a:t> · quotient and remainder</a:t>
+            </a:r>
+            <a:endParaRPr lang="en-US" sz="1100" dirty="0"/>
+          </a:p>
+        </p:txBody>
+      </p:sp>
+      <p:sp>
+        <p:nvSpPr>
           <p:cNvPr id="25" name="Slide Number Placeholder 0"/>
           <p:cNvSpPr>
             <a:spLocks noGrp="1"/>
@@ -29035,6 +31788,158 @@
       </p:sp>
       <p:sp>
         <p:nvSpPr>
+          <p:cNvPr id="17" name="Shape 15"/>
+          <p:cNvSpPr/>
+          <p:nvPr/>
+        </p:nvSpPr>
+        <p:spPr>
+          <a:xfrm>
+            <a:off x="9287967" y="91440"/>
+            <a:ext cx="2355088" cy="274320"/>
+          </a:xfrm>
+          <a:prstGeom prst="rect">
+            <a:avLst/>
+          </a:prstGeom>
+          <a:solidFill>
+            <a:srgbClr val="FEF3C7"/>
+          </a:solidFill>
+          <a:ln w="12700">
+            <a:solidFill>
+              <a:srgbClr val="B45309"/>
+            </a:solidFill>
+            <a:prstDash val="solid"/>
+          </a:ln>
+        </p:spPr>
+      </p:sp>
+      <p:sp>
+        <p:nvSpPr>
+          <p:cNvPr id="18" name="Shape 16"/>
+          <p:cNvSpPr/>
+          <p:nvPr/>
+        </p:nvSpPr>
+        <p:spPr>
+          <a:xfrm>
+            <a:off x="9287967" y="91440"/>
+            <a:ext cx="27432" cy="274320"/>
+          </a:xfrm>
+          <a:prstGeom prst="rect">
+            <a:avLst/>
+          </a:prstGeom>
+          <a:solidFill>
+            <a:srgbClr val="B45309"/>
+          </a:solidFill>
+          <a:ln w="12700">
+            <a:solidFill>
+              <a:srgbClr val="B45309"/>
+            </a:solidFill>
+            <a:prstDash val="solid"/>
+          </a:ln>
+        </p:spPr>
+      </p:sp>
+      <p:sp>
+        <p:nvSpPr>
+          <p:cNvPr id="19" name="Shape 17"/>
+          <p:cNvSpPr/>
+          <p:nvPr/>
+        </p:nvSpPr>
+        <p:spPr>
+          <a:xfrm>
+            <a:off x="9342831" y="91440"/>
+            <a:ext cx="27432" cy="274320"/>
+          </a:xfrm>
+          <a:prstGeom prst="rect">
+            <a:avLst/>
+          </a:prstGeom>
+          <a:solidFill>
+            <a:srgbClr val="B45309"/>
+          </a:solidFill>
+          <a:ln w="12700">
+            <a:solidFill>
+              <a:srgbClr val="B45309"/>
+            </a:solidFill>
+            <a:prstDash val="solid"/>
+          </a:ln>
+        </p:spPr>
+      </p:sp>
+      <p:pic>
+        <p:nvPicPr>
+          <p:cNvPr id="20" name="Image 0" descr="preencoded.png">    </p:cNvPr>
+          <p:cNvPicPr>
+            <a:picLocks noChangeAspect="1"/>
+          </p:cNvPicPr>
+          <p:nvPr/>
+        </p:nvPicPr>
+        <p:blipFill>
+          <a:blip r:embed="rId1"/>
+          <a:stretch>
+            <a:fillRect/>
+          </a:stretch>
+        </p:blipFill>
+        <p:spPr>
+          <a:xfrm>
+            <a:off x="9415983" y="128016"/>
+            <a:ext cx="201168" cy="201168"/>
+          </a:xfrm>
+          <a:prstGeom prst="rect">
+            <a:avLst/>
+          </a:prstGeom>
+        </p:spPr>
+      </p:pic>
+      <p:sp>
+        <p:nvSpPr>
+          <p:cNvPr id="21" name="Text 18"/>
+          <p:cNvSpPr txBox="1"/>
+          <p:nvPr/>
+        </p:nvSpPr>
+        <p:spPr>
+          <a:xfrm>
+            <a:off x="9672015" y="91440"/>
+            <a:ext cx="1934464" cy="274320"/>
+          </a:xfrm>
+          <a:prstGeom prst="rect">
+            <a:avLst/>
+          </a:prstGeom>
+          <a:noFill/>
+          <a:ln/>
+        </p:spPr>
+        <p:txBody>
+          <a:bodyPr wrap="square" lIns="0" tIns="0" rIns="0" bIns="0" rtlCol="0" anchor="ctr"/>
+          <a:lstStyle/>
+          <a:p>
+            <a:pPr indent="0" marL="0">
+              <a:buNone/>
+            </a:pPr>
+            <a:r>
+              <a:rPr lang="en-US" sz="1100" b="1" dirty="0">
+                <a:solidFill>
+                  <a:srgbClr val="92400E"/>
+                </a:solidFill>
+                <a:latin typeface="Calibri" pitchFamily="34" charset="0"/>
+                <a:ea typeface="Calibri" pitchFamily="34" charset="-122"/>
+                <a:cs typeface="Calibri" pitchFamily="34" charset="-120"/>
+              </a:rPr>
+              <a:t>USE NOW</a:t>
+            </a:r>
+            <a:pPr indent="0" marL="0">
+              <a:buNone/>
+            </a:pPr>
+            <a:r>
+              <a:rPr lang="en-US" sz="1100" dirty="0">
+                <a:solidFill>
+                  <a:srgbClr val="92400E"/>
+                </a:solidFill>
+                <a:latin typeface="Calibri" pitchFamily="34" charset="0"/>
+                <a:ea typeface="Calibri" pitchFamily="34" charset="-122"/>
+                <a:cs typeface="Calibri" pitchFamily="34" charset="-120"/>
+              </a:rPr>
+              <a:t> · the PRG32 tools</a:t>
+            </a:r>
+            <a:endParaRPr lang="en-US" sz="1100" dirty="0"/>
+          </a:p>
+        </p:txBody>
+      </p:sp>
+      <p:sp>
+        <p:nvSpPr>
           <p:cNvPr id="25" name="Slide Number Placeholder 0"/>
           <p:cNvSpPr>
             <a:spLocks noGrp="1"/>
@@ -29871,6 +32776,158 @@
       </p:sp>
       <p:sp>
         <p:nvSpPr>
+          <p:cNvPr id="17" name="Shape 15"/>
+          <p:cNvSpPr/>
+          <p:nvPr/>
+        </p:nvSpPr>
+        <p:spPr>
+          <a:xfrm>
+            <a:off x="9287967" y="91440"/>
+            <a:ext cx="2355088" cy="274320"/>
+          </a:xfrm>
+          <a:prstGeom prst="rect">
+            <a:avLst/>
+          </a:prstGeom>
+          <a:solidFill>
+            <a:srgbClr val="FEF3C7"/>
+          </a:solidFill>
+          <a:ln w="12700">
+            <a:solidFill>
+              <a:srgbClr val="B45309"/>
+            </a:solidFill>
+            <a:prstDash val="solid"/>
+          </a:ln>
+        </p:spPr>
+      </p:sp>
+      <p:sp>
+        <p:nvSpPr>
+          <p:cNvPr id="18" name="Shape 16"/>
+          <p:cNvSpPr/>
+          <p:nvPr/>
+        </p:nvSpPr>
+        <p:spPr>
+          <a:xfrm>
+            <a:off x="9287967" y="91440"/>
+            <a:ext cx="27432" cy="274320"/>
+          </a:xfrm>
+          <a:prstGeom prst="rect">
+            <a:avLst/>
+          </a:prstGeom>
+          <a:solidFill>
+            <a:srgbClr val="B45309"/>
+          </a:solidFill>
+          <a:ln w="12700">
+            <a:solidFill>
+              <a:srgbClr val="B45309"/>
+            </a:solidFill>
+            <a:prstDash val="solid"/>
+          </a:ln>
+        </p:spPr>
+      </p:sp>
+      <p:sp>
+        <p:nvSpPr>
+          <p:cNvPr id="19" name="Shape 17"/>
+          <p:cNvSpPr/>
+          <p:nvPr/>
+        </p:nvSpPr>
+        <p:spPr>
+          <a:xfrm>
+            <a:off x="9342831" y="91440"/>
+            <a:ext cx="27432" cy="274320"/>
+          </a:xfrm>
+          <a:prstGeom prst="rect">
+            <a:avLst/>
+          </a:prstGeom>
+          <a:solidFill>
+            <a:srgbClr val="B45309"/>
+          </a:solidFill>
+          <a:ln w="12700">
+            <a:solidFill>
+              <a:srgbClr val="B45309"/>
+            </a:solidFill>
+            <a:prstDash val="solid"/>
+          </a:ln>
+        </p:spPr>
+      </p:sp>
+      <p:pic>
+        <p:nvPicPr>
+          <p:cNvPr id="20" name="Image 0" descr="preencoded.png">    </p:cNvPr>
+          <p:cNvPicPr>
+            <a:picLocks noChangeAspect="1"/>
+          </p:cNvPicPr>
+          <p:nvPr/>
+        </p:nvPicPr>
+        <p:blipFill>
+          <a:blip r:embed="rId1"/>
+          <a:stretch>
+            <a:fillRect/>
+          </a:stretch>
+        </p:blipFill>
+        <p:spPr>
+          <a:xfrm>
+            <a:off x="9415983" y="128016"/>
+            <a:ext cx="201168" cy="201168"/>
+          </a:xfrm>
+          <a:prstGeom prst="rect">
+            <a:avLst/>
+          </a:prstGeom>
+        </p:spPr>
+      </p:pic>
+      <p:sp>
+        <p:nvSpPr>
+          <p:cNvPr id="21" name="Text 18"/>
+          <p:cNvSpPr txBox="1"/>
+          <p:nvPr/>
+        </p:nvSpPr>
+        <p:spPr>
+          <a:xfrm>
+            <a:off x="9672015" y="91440"/>
+            <a:ext cx="1934464" cy="274320"/>
+          </a:xfrm>
+          <a:prstGeom prst="rect">
+            <a:avLst/>
+          </a:prstGeom>
+          <a:noFill/>
+          <a:ln/>
+        </p:spPr>
+        <p:txBody>
+          <a:bodyPr wrap="square" lIns="0" tIns="0" rIns="0" bIns="0" rtlCol="0" anchor="ctr"/>
+          <a:lstStyle/>
+          <a:p>
+            <a:pPr indent="0" marL="0">
+              <a:buNone/>
+            </a:pPr>
+            <a:r>
+              <a:rPr lang="en-US" sz="1100" b="1" dirty="0">
+                <a:solidFill>
+                  <a:srgbClr val="92400E"/>
+                </a:solidFill>
+                <a:latin typeface="Calibri" pitchFamily="34" charset="0"/>
+                <a:ea typeface="Calibri" pitchFamily="34" charset="-122"/>
+                <a:cs typeface="Calibri" pitchFamily="34" charset="-120"/>
+              </a:rPr>
+              <a:t>USE NOW</a:t>
+            </a:r>
+            <a:pPr indent="0" marL="0">
+              <a:buNone/>
+            </a:pPr>
+            <a:r>
+              <a:rPr lang="en-US" sz="1100" dirty="0">
+                <a:solidFill>
+                  <a:srgbClr val="92400E"/>
+                </a:solidFill>
+                <a:latin typeface="Calibri" pitchFamily="34" charset="0"/>
+                <a:ea typeface="Calibri" pitchFamily="34" charset="-122"/>
+                <a:cs typeface="Calibri" pitchFamily="34" charset="-120"/>
+              </a:rPr>
+              <a:t> · the PRG32 tools</a:t>
+            </a:r>
+            <a:endParaRPr lang="en-US" sz="1100" dirty="0"/>
+          </a:p>
+        </p:txBody>
+      </p:sp>
+      <p:sp>
+        <p:nvSpPr>
           <p:cNvPr id="25" name="Slide Number Placeholder 0"/>
           <p:cNvSpPr>
             <a:spLocks noGrp="1"/>
@@ -30702,6 +33759,158 @@
               <a:t>A black screen: check the wiring of the display against the firmware</a:t>
             </a:r>
             <a:endParaRPr lang="en-US" sz="1200" dirty="0"/>
+          </a:p>
+        </p:txBody>
+      </p:sp>
+      <p:sp>
+        <p:nvSpPr>
+          <p:cNvPr id="17" name="Shape 15"/>
+          <p:cNvSpPr/>
+          <p:nvPr/>
+        </p:nvSpPr>
+        <p:spPr>
+          <a:xfrm>
+            <a:off x="9287967" y="91440"/>
+            <a:ext cx="2355088" cy="274320"/>
+          </a:xfrm>
+          <a:prstGeom prst="rect">
+            <a:avLst/>
+          </a:prstGeom>
+          <a:solidFill>
+            <a:srgbClr val="FEF3C7"/>
+          </a:solidFill>
+          <a:ln w="12700">
+            <a:solidFill>
+              <a:srgbClr val="B45309"/>
+            </a:solidFill>
+            <a:prstDash val="solid"/>
+          </a:ln>
+        </p:spPr>
+      </p:sp>
+      <p:sp>
+        <p:nvSpPr>
+          <p:cNvPr id="18" name="Shape 16"/>
+          <p:cNvSpPr/>
+          <p:nvPr/>
+        </p:nvSpPr>
+        <p:spPr>
+          <a:xfrm>
+            <a:off x="9287967" y="91440"/>
+            <a:ext cx="27432" cy="274320"/>
+          </a:xfrm>
+          <a:prstGeom prst="rect">
+            <a:avLst/>
+          </a:prstGeom>
+          <a:solidFill>
+            <a:srgbClr val="B45309"/>
+          </a:solidFill>
+          <a:ln w="12700">
+            <a:solidFill>
+              <a:srgbClr val="B45309"/>
+            </a:solidFill>
+            <a:prstDash val="solid"/>
+          </a:ln>
+        </p:spPr>
+      </p:sp>
+      <p:sp>
+        <p:nvSpPr>
+          <p:cNvPr id="19" name="Shape 17"/>
+          <p:cNvSpPr/>
+          <p:nvPr/>
+        </p:nvSpPr>
+        <p:spPr>
+          <a:xfrm>
+            <a:off x="9342831" y="91440"/>
+            <a:ext cx="27432" cy="274320"/>
+          </a:xfrm>
+          <a:prstGeom prst="rect">
+            <a:avLst/>
+          </a:prstGeom>
+          <a:solidFill>
+            <a:srgbClr val="B45309"/>
+          </a:solidFill>
+          <a:ln w="12700">
+            <a:solidFill>
+              <a:srgbClr val="B45309"/>
+            </a:solidFill>
+            <a:prstDash val="solid"/>
+          </a:ln>
+        </p:spPr>
+      </p:sp>
+      <p:pic>
+        <p:nvPicPr>
+          <p:cNvPr id="20" name="Image 0" descr="preencoded.png">    </p:cNvPr>
+          <p:cNvPicPr>
+            <a:picLocks noChangeAspect="1"/>
+          </p:cNvPicPr>
+          <p:nvPr/>
+        </p:nvPicPr>
+        <p:blipFill>
+          <a:blip r:embed="rId1"/>
+          <a:stretch>
+            <a:fillRect/>
+          </a:stretch>
+        </p:blipFill>
+        <p:spPr>
+          <a:xfrm>
+            <a:off x="9415983" y="128016"/>
+            <a:ext cx="201168" cy="201168"/>
+          </a:xfrm>
+          <a:prstGeom prst="rect">
+            <a:avLst/>
+          </a:prstGeom>
+        </p:spPr>
+      </p:pic>
+      <p:sp>
+        <p:nvSpPr>
+          <p:cNvPr id="21" name="Text 18"/>
+          <p:cNvSpPr txBox="1"/>
+          <p:nvPr/>
+        </p:nvSpPr>
+        <p:spPr>
+          <a:xfrm>
+            <a:off x="9672015" y="91440"/>
+            <a:ext cx="1934464" cy="274320"/>
+          </a:xfrm>
+          <a:prstGeom prst="rect">
+            <a:avLst/>
+          </a:prstGeom>
+          <a:noFill/>
+          <a:ln/>
+        </p:spPr>
+        <p:txBody>
+          <a:bodyPr wrap="square" lIns="0" tIns="0" rIns="0" bIns="0" rtlCol="0" anchor="ctr"/>
+          <a:lstStyle/>
+          <a:p>
+            <a:pPr indent="0" marL="0">
+              <a:buNone/>
+            </a:pPr>
+            <a:r>
+              <a:rPr lang="en-US" sz="1100" b="1" dirty="0">
+                <a:solidFill>
+                  <a:srgbClr val="92400E"/>
+                </a:solidFill>
+                <a:latin typeface="Calibri" pitchFamily="34" charset="0"/>
+                <a:ea typeface="Calibri" pitchFamily="34" charset="-122"/>
+                <a:cs typeface="Calibri" pitchFamily="34" charset="-120"/>
+              </a:rPr>
+              <a:t>USE NOW</a:t>
+            </a:r>
+            <a:pPr indent="0" marL="0">
+              <a:buNone/>
+            </a:pPr>
+            <a:r>
+              <a:rPr lang="en-US" sz="1100" dirty="0">
+                <a:solidFill>
+                  <a:srgbClr val="92400E"/>
+                </a:solidFill>
+                <a:latin typeface="Calibri" pitchFamily="34" charset="0"/>
+                <a:ea typeface="Calibri" pitchFamily="34" charset="-122"/>
+                <a:cs typeface="Calibri" pitchFamily="34" charset="-120"/>
+              </a:rPr>
+              <a:t> · the PRG32 tools</a:t>
+            </a:r>
+            <a:endParaRPr lang="en-US" sz="1100" dirty="0"/>
           </a:p>
         </p:txBody>
       </p:sp>
@@ -32088,6 +35297,158 @@
       </p:graphicFrame>
       <p:sp>
         <p:nvSpPr>
+          <p:cNvPr id="4" name="Shape 1"/>
+          <p:cNvSpPr/>
+          <p:nvPr/>
+        </p:nvSpPr>
+        <p:spPr>
+          <a:xfrm>
+            <a:off x="9287967" y="91440"/>
+            <a:ext cx="2355088" cy="274320"/>
+          </a:xfrm>
+          <a:prstGeom prst="rect">
+            <a:avLst/>
+          </a:prstGeom>
+          <a:solidFill>
+            <a:srgbClr val="FEF3C7"/>
+          </a:solidFill>
+          <a:ln w="12700">
+            <a:solidFill>
+              <a:srgbClr val="B45309"/>
+            </a:solidFill>
+            <a:prstDash val="solid"/>
+          </a:ln>
+        </p:spPr>
+      </p:sp>
+      <p:sp>
+        <p:nvSpPr>
+          <p:cNvPr id="5" name="Shape 2"/>
+          <p:cNvSpPr/>
+          <p:nvPr/>
+        </p:nvSpPr>
+        <p:spPr>
+          <a:xfrm>
+            <a:off x="9287967" y="91440"/>
+            <a:ext cx="27432" cy="274320"/>
+          </a:xfrm>
+          <a:prstGeom prst="rect">
+            <a:avLst/>
+          </a:prstGeom>
+          <a:solidFill>
+            <a:srgbClr val="B45309"/>
+          </a:solidFill>
+          <a:ln w="12700">
+            <a:solidFill>
+              <a:srgbClr val="B45309"/>
+            </a:solidFill>
+            <a:prstDash val="solid"/>
+          </a:ln>
+        </p:spPr>
+      </p:sp>
+      <p:sp>
+        <p:nvSpPr>
+          <p:cNvPr id="6" name="Shape 3"/>
+          <p:cNvSpPr/>
+          <p:nvPr/>
+        </p:nvSpPr>
+        <p:spPr>
+          <a:xfrm>
+            <a:off x="9342831" y="91440"/>
+            <a:ext cx="27432" cy="274320"/>
+          </a:xfrm>
+          <a:prstGeom prst="rect">
+            <a:avLst/>
+          </a:prstGeom>
+          <a:solidFill>
+            <a:srgbClr val="B45309"/>
+          </a:solidFill>
+          <a:ln w="12700">
+            <a:solidFill>
+              <a:srgbClr val="B45309"/>
+            </a:solidFill>
+            <a:prstDash val="solid"/>
+          </a:ln>
+        </p:spPr>
+      </p:sp>
+      <p:pic>
+        <p:nvPicPr>
+          <p:cNvPr id="7" name="Image 0" descr="preencoded.png">    </p:cNvPr>
+          <p:cNvPicPr>
+            <a:picLocks noChangeAspect="1"/>
+          </p:cNvPicPr>
+          <p:nvPr/>
+        </p:nvPicPr>
+        <p:blipFill>
+          <a:blip r:embed="rId1"/>
+          <a:stretch>
+            <a:fillRect/>
+          </a:stretch>
+        </p:blipFill>
+        <p:spPr>
+          <a:xfrm>
+            <a:off x="9415983" y="128016"/>
+            <a:ext cx="201168" cy="201168"/>
+          </a:xfrm>
+          <a:prstGeom prst="rect">
+            <a:avLst/>
+          </a:prstGeom>
+        </p:spPr>
+      </p:pic>
+      <p:sp>
+        <p:nvSpPr>
+          <p:cNvPr id="8" name="Text 4"/>
+          <p:cNvSpPr txBox="1"/>
+          <p:nvPr/>
+        </p:nvSpPr>
+        <p:spPr>
+          <a:xfrm>
+            <a:off x="9672015" y="91440"/>
+            <a:ext cx="1934464" cy="274320"/>
+          </a:xfrm>
+          <a:prstGeom prst="rect">
+            <a:avLst/>
+          </a:prstGeom>
+          <a:noFill/>
+          <a:ln/>
+        </p:spPr>
+        <p:txBody>
+          <a:bodyPr wrap="square" lIns="0" tIns="0" rIns="0" bIns="0" rtlCol="0" anchor="ctr"/>
+          <a:lstStyle/>
+          <a:p>
+            <a:pPr indent="0" marL="0">
+              <a:buNone/>
+            </a:pPr>
+            <a:r>
+              <a:rPr lang="en-US" sz="1100" b="1" dirty="0">
+                <a:solidFill>
+                  <a:srgbClr val="92400E"/>
+                </a:solidFill>
+                <a:latin typeface="Calibri" pitchFamily="34" charset="0"/>
+                <a:ea typeface="Calibri" pitchFamily="34" charset="-122"/>
+                <a:cs typeface="Calibri" pitchFamily="34" charset="-120"/>
+              </a:rPr>
+              <a:t>USE NOW</a:t>
+            </a:r>
+            <a:pPr indent="0" marL="0">
+              <a:buNone/>
+            </a:pPr>
+            <a:r>
+              <a:rPr lang="en-US" sz="1100" dirty="0">
+                <a:solidFill>
+                  <a:srgbClr val="92400E"/>
+                </a:solidFill>
+                <a:latin typeface="Calibri" pitchFamily="34" charset="0"/>
+                <a:ea typeface="Calibri" pitchFamily="34" charset="-122"/>
+                <a:cs typeface="Calibri" pitchFamily="34" charset="-120"/>
+              </a:rPr>
+              <a:t> · the PRG32 tools</a:t>
+            </a:r>
+            <a:endParaRPr lang="en-US" sz="1100" dirty="0"/>
+          </a:p>
+        </p:txBody>
+      </p:sp>
+      <p:sp>
+        <p:nvSpPr>
           <p:cNvPr id="25" name="Slide Number Placeholder 0"/>
           <p:cNvSpPr>
             <a:spLocks noGrp="1"/>
@@ -33727,6 +37088,133 @@
       </p:sp>
       <p:sp>
         <p:nvSpPr>
+          <p:cNvPr id="17" name="Shape 15"/>
+          <p:cNvSpPr/>
+          <p:nvPr/>
+        </p:nvSpPr>
+        <p:spPr>
+          <a:xfrm>
+            <a:off x="8222056" y="91440"/>
+            <a:ext cx="3420999" cy="274320"/>
+          </a:xfrm>
+          <a:prstGeom prst="rect">
+            <a:avLst/>
+          </a:prstGeom>
+          <a:solidFill>
+            <a:srgbClr val="E0F2FE"/>
+          </a:solidFill>
+          <a:ln w="12700">
+            <a:solidFill>
+              <a:srgbClr val="0369A1"/>
+            </a:solidFill>
+            <a:prstDash val="solid"/>
+          </a:ln>
+        </p:spPr>
+      </p:sp>
+      <p:sp>
+        <p:nvSpPr>
+          <p:cNvPr id="18" name="Shape 16"/>
+          <p:cNvSpPr/>
+          <p:nvPr/>
+        </p:nvSpPr>
+        <p:spPr>
+          <a:xfrm>
+            <a:off x="8222056" y="91440"/>
+            <a:ext cx="73152" cy="274320"/>
+          </a:xfrm>
+          <a:prstGeom prst="rect">
+            <a:avLst/>
+          </a:prstGeom>
+          <a:solidFill>
+            <a:srgbClr val="0369A1"/>
+          </a:solidFill>
+          <a:ln w="12700">
+            <a:solidFill>
+              <a:srgbClr val="0369A1"/>
+            </a:solidFill>
+            <a:prstDash val="solid"/>
+          </a:ln>
+        </p:spPr>
+      </p:sp>
+      <p:pic>
+        <p:nvPicPr>
+          <p:cNvPr id="19" name="Image 0" descr="preencoded.png">    </p:cNvPr>
+          <p:cNvPicPr>
+            <a:picLocks noChangeAspect="1"/>
+          </p:cNvPicPr>
+          <p:nvPr/>
+        </p:nvPicPr>
+        <p:blipFill>
+          <a:blip r:embed="rId1"/>
+          <a:stretch>
+            <a:fillRect/>
+          </a:stretch>
+        </p:blipFill>
+        <p:spPr>
+          <a:xfrm>
+            <a:off x="8350072" y="128016"/>
+            <a:ext cx="201168" cy="201168"/>
+          </a:xfrm>
+          <a:prstGeom prst="rect">
+            <a:avLst/>
+          </a:prstGeom>
+        </p:spPr>
+      </p:pic>
+      <p:sp>
+        <p:nvSpPr>
+          <p:cNvPr id="20" name="Text 17"/>
+          <p:cNvSpPr txBox="1"/>
+          <p:nvPr/>
+        </p:nvSpPr>
+        <p:spPr>
+          <a:xfrm>
+            <a:off x="8606104" y="91440"/>
+            <a:ext cx="3000375" cy="274320"/>
+          </a:xfrm>
+          <a:prstGeom prst="rect">
+            <a:avLst/>
+          </a:prstGeom>
+          <a:noFill/>
+          <a:ln/>
+        </p:spPr>
+        <p:txBody>
+          <a:bodyPr wrap="square" lIns="0" tIns="0" rIns="0" bIns="0" rtlCol="0" anchor="ctr"/>
+          <a:lstStyle/>
+          <a:p>
+            <a:pPr indent="0" marL="0">
+              <a:buNone/>
+            </a:pPr>
+            <a:r>
+              <a:rPr lang="en-US" sz="1100" b="1" dirty="0">
+                <a:solidFill>
+                  <a:srgbClr val="075985"/>
+                </a:solidFill>
+                <a:latin typeface="Calibri" pitchFamily="34" charset="0"/>
+                <a:ea typeface="Calibri" pitchFamily="34" charset="-122"/>
+                <a:cs typeface="Calibri" pitchFamily="34" charset="-120"/>
+              </a:rPr>
+              <a:t>UNDERSTAND NOW</a:t>
+            </a:r>
+            <a:pPr indent="0" marL="0">
+              <a:buNone/>
+            </a:pPr>
+            <a:r>
+              <a:rPr lang="en-US" sz="1100" dirty="0">
+                <a:solidFill>
+                  <a:srgbClr val="075985"/>
+                </a:solidFill>
+                <a:latin typeface="Calibri" pitchFamily="34" charset="0"/>
+                <a:ea typeface="Calibri" pitchFamily="34" charset="-122"/>
+                <a:cs typeface="Calibri" pitchFamily="34" charset="-120"/>
+              </a:rPr>
+              <a:t> · characters and strings</a:t>
+            </a:r>
+            <a:endParaRPr lang="en-US" sz="1100" dirty="0"/>
+          </a:p>
+        </p:txBody>
+      </p:sp>
+      <p:sp>
+        <p:nvSpPr>
           <p:cNvPr id="25" name="Slide Number Placeholder 0"/>
           <p:cNvSpPr>
             <a:spLocks noGrp="1"/>
@@ -34774,6 +38262,133 @@
       </p:sp>
       <p:sp>
         <p:nvSpPr>
+          <p:cNvPr id="14" name="Shape 12"/>
+          <p:cNvSpPr/>
+          <p:nvPr/>
+        </p:nvSpPr>
+        <p:spPr>
+          <a:xfrm>
+            <a:off x="8222056" y="91440"/>
+            <a:ext cx="3420999" cy="274320"/>
+          </a:xfrm>
+          <a:prstGeom prst="rect">
+            <a:avLst/>
+          </a:prstGeom>
+          <a:solidFill>
+            <a:srgbClr val="E0F2FE"/>
+          </a:solidFill>
+          <a:ln w="12700">
+            <a:solidFill>
+              <a:srgbClr val="0369A1"/>
+            </a:solidFill>
+            <a:prstDash val="solid"/>
+          </a:ln>
+        </p:spPr>
+      </p:sp>
+      <p:sp>
+        <p:nvSpPr>
+          <p:cNvPr id="15" name="Shape 13"/>
+          <p:cNvSpPr/>
+          <p:nvPr/>
+        </p:nvSpPr>
+        <p:spPr>
+          <a:xfrm>
+            <a:off x="8222056" y="91440"/>
+            <a:ext cx="73152" cy="274320"/>
+          </a:xfrm>
+          <a:prstGeom prst="rect">
+            <a:avLst/>
+          </a:prstGeom>
+          <a:solidFill>
+            <a:srgbClr val="0369A1"/>
+          </a:solidFill>
+          <a:ln w="12700">
+            <a:solidFill>
+              <a:srgbClr val="0369A1"/>
+            </a:solidFill>
+            <a:prstDash val="solid"/>
+          </a:ln>
+        </p:spPr>
+      </p:sp>
+      <p:pic>
+        <p:nvPicPr>
+          <p:cNvPr id="16" name="Image 0" descr="preencoded.png">    </p:cNvPr>
+          <p:cNvPicPr>
+            <a:picLocks noChangeAspect="1"/>
+          </p:cNvPicPr>
+          <p:nvPr/>
+        </p:nvPicPr>
+        <p:blipFill>
+          <a:blip r:embed="rId1"/>
+          <a:stretch>
+            <a:fillRect/>
+          </a:stretch>
+        </p:blipFill>
+        <p:spPr>
+          <a:xfrm>
+            <a:off x="8350072" y="128016"/>
+            <a:ext cx="201168" cy="201168"/>
+          </a:xfrm>
+          <a:prstGeom prst="rect">
+            <a:avLst/>
+          </a:prstGeom>
+        </p:spPr>
+      </p:pic>
+      <p:sp>
+        <p:nvSpPr>
+          <p:cNvPr id="17" name="Text 14"/>
+          <p:cNvSpPr txBox="1"/>
+          <p:nvPr/>
+        </p:nvSpPr>
+        <p:spPr>
+          <a:xfrm>
+            <a:off x="8606104" y="91440"/>
+            <a:ext cx="3000375" cy="274320"/>
+          </a:xfrm>
+          <a:prstGeom prst="rect">
+            <a:avLst/>
+          </a:prstGeom>
+          <a:noFill/>
+          <a:ln/>
+        </p:spPr>
+        <p:txBody>
+          <a:bodyPr wrap="square" lIns="0" tIns="0" rIns="0" bIns="0" rtlCol="0" anchor="ctr"/>
+          <a:lstStyle/>
+          <a:p>
+            <a:pPr indent="0" marL="0">
+              <a:buNone/>
+            </a:pPr>
+            <a:r>
+              <a:rPr lang="en-US" sz="1100" b="1" dirty="0">
+                <a:solidFill>
+                  <a:srgbClr val="075985"/>
+                </a:solidFill>
+                <a:latin typeface="Calibri" pitchFamily="34" charset="0"/>
+                <a:ea typeface="Calibri" pitchFamily="34" charset="-122"/>
+                <a:cs typeface="Calibri" pitchFamily="34" charset="-120"/>
+              </a:rPr>
+              <a:t>UNDERSTAND NOW</a:t>
+            </a:r>
+            <a:pPr indent="0" marL="0">
+              <a:buNone/>
+            </a:pPr>
+            <a:r>
+              <a:rPr lang="en-US" sz="1100" dirty="0">
+                <a:solidFill>
+                  <a:srgbClr val="075985"/>
+                </a:solidFill>
+                <a:latin typeface="Calibri" pitchFamily="34" charset="0"/>
+                <a:ea typeface="Calibri" pitchFamily="34" charset="-122"/>
+                <a:cs typeface="Calibri" pitchFamily="34" charset="-120"/>
+              </a:rPr>
+              <a:t> · characters and strings</a:t>
+            </a:r>
+            <a:endParaRPr lang="en-US" sz="1100" dirty="0"/>
+          </a:p>
+        </p:txBody>
+      </p:sp>
+      <p:sp>
+        <p:nvSpPr>
           <p:cNvPr id="25" name="Slide Number Placeholder 0"/>
           <p:cNvSpPr>
             <a:spLocks noGrp="1"/>
@@ -36432,6 +40047,133 @@
       </p:sp>
       <p:sp>
         <p:nvSpPr>
+          <p:cNvPr id="14" name="Shape 12"/>
+          <p:cNvSpPr/>
+          <p:nvPr/>
+        </p:nvSpPr>
+        <p:spPr>
+          <a:xfrm>
+            <a:off x="8944305" y="91440"/>
+            <a:ext cx="2698750" cy="274320"/>
+          </a:xfrm>
+          <a:prstGeom prst="rect">
+            <a:avLst/>
+          </a:prstGeom>
+          <a:solidFill>
+            <a:srgbClr val="E0F2FE"/>
+          </a:solidFill>
+          <a:ln w="12700">
+            <a:solidFill>
+              <a:srgbClr val="0369A1"/>
+            </a:solidFill>
+            <a:prstDash val="solid"/>
+          </a:ln>
+        </p:spPr>
+      </p:sp>
+      <p:sp>
+        <p:nvSpPr>
+          <p:cNvPr id="15" name="Shape 13"/>
+          <p:cNvSpPr/>
+          <p:nvPr/>
+        </p:nvSpPr>
+        <p:spPr>
+          <a:xfrm>
+            <a:off x="8944305" y="91440"/>
+            <a:ext cx="73152" cy="274320"/>
+          </a:xfrm>
+          <a:prstGeom prst="rect">
+            <a:avLst/>
+          </a:prstGeom>
+          <a:solidFill>
+            <a:srgbClr val="0369A1"/>
+          </a:solidFill>
+          <a:ln w="12700">
+            <a:solidFill>
+              <a:srgbClr val="0369A1"/>
+            </a:solidFill>
+            <a:prstDash val="solid"/>
+          </a:ln>
+        </p:spPr>
+      </p:sp>
+      <p:pic>
+        <p:nvPicPr>
+          <p:cNvPr id="16" name="Image 0" descr="preencoded.png">    </p:cNvPr>
+          <p:cNvPicPr>
+            <a:picLocks noChangeAspect="1"/>
+          </p:cNvPicPr>
+          <p:nvPr/>
+        </p:nvPicPr>
+        <p:blipFill>
+          <a:blip r:embed="rId1"/>
+          <a:stretch>
+            <a:fillRect/>
+          </a:stretch>
+        </p:blipFill>
+        <p:spPr>
+          <a:xfrm>
+            <a:off x="9072321" y="128016"/>
+            <a:ext cx="201168" cy="201168"/>
+          </a:xfrm>
+          <a:prstGeom prst="rect">
+            <a:avLst/>
+          </a:prstGeom>
+        </p:spPr>
+      </p:pic>
+      <p:sp>
+        <p:nvSpPr>
+          <p:cNvPr id="17" name="Text 14"/>
+          <p:cNvSpPr txBox="1"/>
+          <p:nvPr/>
+        </p:nvSpPr>
+        <p:spPr>
+          <a:xfrm>
+            <a:off x="9328353" y="91440"/>
+            <a:ext cx="2278126" cy="274320"/>
+          </a:xfrm>
+          <a:prstGeom prst="rect">
+            <a:avLst/>
+          </a:prstGeom>
+          <a:noFill/>
+          <a:ln/>
+        </p:spPr>
+        <p:txBody>
+          <a:bodyPr wrap="square" lIns="0" tIns="0" rIns="0" bIns="0" rtlCol="0" anchor="ctr"/>
+          <a:lstStyle/>
+          <a:p>
+            <a:pPr indent="0" marL="0">
+              <a:buNone/>
+            </a:pPr>
+            <a:r>
+              <a:rPr lang="en-US" sz="1100" b="1" dirty="0">
+                <a:solidFill>
+                  <a:srgbClr val="075985"/>
+                </a:solidFill>
+                <a:latin typeface="Calibri" pitchFamily="34" charset="0"/>
+                <a:ea typeface="Calibri" pitchFamily="34" charset="-122"/>
+                <a:cs typeface="Calibri" pitchFamily="34" charset="-120"/>
+              </a:rPr>
+              <a:t>UNDERSTAND NOW</a:t>
+            </a:r>
+            <a:pPr indent="0" marL="0">
+              <a:buNone/>
+            </a:pPr>
+            <a:r>
+              <a:rPr lang="en-US" sz="1100" dirty="0">
+                <a:solidFill>
+                  <a:srgbClr val="075985"/>
+                </a:solidFill>
+                <a:latin typeface="Calibri" pitchFamily="34" charset="0"/>
+                <a:ea typeface="Calibri" pitchFamily="34" charset="-122"/>
+                <a:cs typeface="Calibri" pitchFamily="34" charset="-120"/>
+              </a:rPr>
+              <a:t> · fixed point</a:t>
+            </a:r>
+            <a:endParaRPr lang="en-US" sz="1100" dirty="0"/>
+          </a:p>
+        </p:txBody>
+      </p:sp>
+      <p:sp>
+        <p:nvSpPr>
           <p:cNvPr id="25" name="Slide Number Placeholder 0"/>
           <p:cNvSpPr>
             <a:spLocks noGrp="1"/>
@@ -37452,6 +41194,133 @@
               <a:t>The limit is reached at 16 points</a:t>
             </a:r>
             <a:endParaRPr lang="en-US" sz="1600" dirty="0"/>
+          </a:p>
+        </p:txBody>
+      </p:sp>
+      <p:sp>
+        <p:nvSpPr>
+          <p:cNvPr id="17" name="Shape 15"/>
+          <p:cNvSpPr/>
+          <p:nvPr/>
+        </p:nvSpPr>
+        <p:spPr>
+          <a:xfrm>
+            <a:off x="8944305" y="91440"/>
+            <a:ext cx="2698750" cy="274320"/>
+          </a:xfrm>
+          <a:prstGeom prst="rect">
+            <a:avLst/>
+          </a:prstGeom>
+          <a:solidFill>
+            <a:srgbClr val="E0F2FE"/>
+          </a:solidFill>
+          <a:ln w="12700">
+            <a:solidFill>
+              <a:srgbClr val="0369A1"/>
+            </a:solidFill>
+            <a:prstDash val="solid"/>
+          </a:ln>
+        </p:spPr>
+      </p:sp>
+      <p:sp>
+        <p:nvSpPr>
+          <p:cNvPr id="18" name="Shape 16"/>
+          <p:cNvSpPr/>
+          <p:nvPr/>
+        </p:nvSpPr>
+        <p:spPr>
+          <a:xfrm>
+            <a:off x="8944305" y="91440"/>
+            <a:ext cx="73152" cy="274320"/>
+          </a:xfrm>
+          <a:prstGeom prst="rect">
+            <a:avLst/>
+          </a:prstGeom>
+          <a:solidFill>
+            <a:srgbClr val="0369A1"/>
+          </a:solidFill>
+          <a:ln w="12700">
+            <a:solidFill>
+              <a:srgbClr val="0369A1"/>
+            </a:solidFill>
+            <a:prstDash val="solid"/>
+          </a:ln>
+        </p:spPr>
+      </p:sp>
+      <p:pic>
+        <p:nvPicPr>
+          <p:cNvPr id="19" name="Image 0" descr="preencoded.png">    </p:cNvPr>
+          <p:cNvPicPr>
+            <a:picLocks noChangeAspect="1"/>
+          </p:cNvPicPr>
+          <p:nvPr/>
+        </p:nvPicPr>
+        <p:blipFill>
+          <a:blip r:embed="rId1"/>
+          <a:stretch>
+            <a:fillRect/>
+          </a:stretch>
+        </p:blipFill>
+        <p:spPr>
+          <a:xfrm>
+            <a:off x="9072321" y="128016"/>
+            <a:ext cx="201168" cy="201168"/>
+          </a:xfrm>
+          <a:prstGeom prst="rect">
+            <a:avLst/>
+          </a:prstGeom>
+        </p:spPr>
+      </p:pic>
+      <p:sp>
+        <p:nvSpPr>
+          <p:cNvPr id="20" name="Text 17"/>
+          <p:cNvSpPr txBox="1"/>
+          <p:nvPr/>
+        </p:nvSpPr>
+        <p:spPr>
+          <a:xfrm>
+            <a:off x="9328353" y="91440"/>
+            <a:ext cx="2278126" cy="274320"/>
+          </a:xfrm>
+          <a:prstGeom prst="rect">
+            <a:avLst/>
+          </a:prstGeom>
+          <a:noFill/>
+          <a:ln/>
+        </p:spPr>
+        <p:txBody>
+          <a:bodyPr wrap="square" lIns="0" tIns="0" rIns="0" bIns="0" rtlCol="0" anchor="ctr"/>
+          <a:lstStyle/>
+          <a:p>
+            <a:pPr indent="0" marL="0">
+              <a:buNone/>
+            </a:pPr>
+            <a:r>
+              <a:rPr lang="en-US" sz="1100" b="1" dirty="0">
+                <a:solidFill>
+                  <a:srgbClr val="075985"/>
+                </a:solidFill>
+                <a:latin typeface="Calibri" pitchFamily="34" charset="0"/>
+                <a:ea typeface="Calibri" pitchFamily="34" charset="-122"/>
+                <a:cs typeface="Calibri" pitchFamily="34" charset="-120"/>
+              </a:rPr>
+              <a:t>UNDERSTAND NOW</a:t>
+            </a:r>
+            <a:pPr indent="0" marL="0">
+              <a:buNone/>
+            </a:pPr>
+            <a:r>
+              <a:rPr lang="en-US" sz="1100" dirty="0">
+                <a:solidFill>
+                  <a:srgbClr val="075985"/>
+                </a:solidFill>
+                <a:latin typeface="Calibri" pitchFamily="34" charset="0"/>
+                <a:ea typeface="Calibri" pitchFamily="34" charset="-122"/>
+                <a:cs typeface="Calibri" pitchFamily="34" charset="-120"/>
+              </a:rPr>
+              <a:t> · fixed point</a:t>
+            </a:r>
+            <a:endParaRPr lang="en-US" sz="1100" dirty="0"/>
           </a:p>
         </p:txBody>
       </p:sp>

--- a/en/slides/22-Computer_Architecture-Verm1_Part_4-Code.pptx
+++ b/en/slides/22-Computer_Architecture-Verm1_Part_4-Code.pptx
@@ -150,18 +150,18 @@
   <p:extLst>
     <p:ext uri="{521415D9-36F7-43E2-AB2F-B90AF26B5E84}">
       <p14:sectionLst xmlns:p14="http://schemas.microsoft.com/office/powerpoint/2010/main">
-        <p14:section name="Opening" id="{bf09bdca-f730-2159-9617-da385ec5a568}">
+        <p14:section name="Opening" id="{d7775e12-70d2-87dd-eb8d-906aa22122db}">
           <p14:sldIdLst>
             <p14:sldId id="256"/>
             <p14:sldId id="257"/>
           </p14:sldIdLst>
         </p14:section>
-        <p14:section name="The listings" id="{21439780-9c95-9257-eb4b-06bf0b3978c4}">
+        <p14:section name="The listings" id="{e0bb24f3-b7d6-de01-71a8-567b9afe358e}">
           <p14:sldIdLst>
             <p14:sldId id="258"/>
           </p14:sldIdLst>
         </p14:section>
-        <p14:section name="Step 1: the score in digits" id="{eabb208f-0c6b-6f44-7fb9-0d4f17fd67d6}">
+        <p14:section name="Step 1: the score in digits" id="{da194d8a-5fe9-2223-e8a3-caa14bfbc82d}">
           <p14:sldIdLst>
             <p14:sldId id="259"/>
             <p14:sldId id="260"/>
@@ -169,14 +169,14 @@
             <p14:sldId id="262"/>
           </p14:sldIdLst>
         </p14:section>
-        <p14:section name="Step 2: levels" id="{c9038bb8-57c2-925b-9adc-0d8a9a8c78a6}">
+        <p14:section name="Step 2: levels" id="{ffcaf196-ff3b-7345-94b3-0f2028c369d5}">
           <p14:sldIdLst>
             <p14:sldId id="263"/>
             <p14:sldId id="264"/>
             <p14:sldId id="265"/>
           </p14:sldIdLst>
         </p14:section>
-        <p14:section name="Step 3: step tells what it changed" id="{323dac1d-278e-05a8-9f84-a615ffd3a4f2}">
+        <p14:section name="Step 3: step tells what it changed" id="{5b2ed54c-af28-948f-e8f4-d0fd1c57855f}">
           <p14:sldIdLst>
             <p14:sldId id="266"/>
             <p14:sldId id="267"/>
@@ -188,7 +188,7 @@
             <p14:sldId id="273"/>
           </p14:sldIdLst>
         </p14:section>
-        <p14:section name="Step 4: draw only what changed" id="{b96a3c09-7a57-e0f9-cf1f-d26b17f00051}">
+        <p14:section name="Step 4: draw only what changed" id="{c7b7331f-8135-1c6e-c636-94ac38be92b1}">
           <p14:sldIdLst>
             <p14:sldId id="274"/>
             <p14:sldId id="275"/>
@@ -203,7 +203,7 @@
             <p14:sldId id="284"/>
           </p14:sldIdLst>
         </p14:section>
-        <p14:section name="Step 5: measure" id="{e8116d8f-e7c5-6449-e1d0-d365133578dc}">
+        <p14:section name="Step 5: measure" id="{04265a7f-1d24-41f7-f131-b45a415ce913}">
           <p14:sldIdLst>
             <p14:sldId id="285"/>
             <p14:sldId id="286"/>
@@ -216,7 +216,7 @@
             <p14:sldId id="293"/>
           </p14:sldIdLst>
         </p14:section>
-        <p14:section name="Run it and test it" id="{206a13b6-a645-890b-21da-e754a2f189a6}">
+        <p14:section name="Run it and test it" id="{af486aef-e037-7eb0-1b50-af7a169597ca}">
           <p14:sldIdLst>
             <p14:sldId id="294"/>
             <p14:sldId id="295"/>
@@ -225,7 +225,7 @@
             <p14:sldId id="298"/>
           </p14:sldIdLst>
         </p14:section>
-        <p14:section name="Exercises" id="{a7573174-ea8f-7240-6f25-2d9208c0c585}">
+        <p14:section name="Exercises" id="{ce32a00b-f5dd-0685-abf2-1320abe60d23}">
           <p14:sldIdLst>
             <p14:sldId id="299"/>
           </p14:sldIdLst>
